--- a/docs/pptx/auc3/ritu-auc3-linsubhr-sens-grade3_10pct.pptx
+++ b/docs/pptx/auc3/ritu-auc3-linsubhr-sens-grade3_10pct.pptx
@@ -2443,7 +2443,7 @@
           </p:nvSpPr>
           <p:spPr>
             <a:xfrm>
-              <a:off x="1342929" y="2073503"/>
+              <a:off x="1343231" y="2073503"/>
               <a:ext cx="0" cy="3649639"/>
             </a:xfrm>
             <a:custGeom>
@@ -2486,7 +2486,7 @@
           </p:nvSpPr>
           <p:spPr>
             <a:xfrm>
-              <a:off x="2182565" y="2073503"/>
+              <a:off x="2181282" y="2073503"/>
               <a:ext cx="0" cy="3649639"/>
             </a:xfrm>
             <a:custGeom>
@@ -2529,7 +2529,7 @@
           </p:nvSpPr>
           <p:spPr>
             <a:xfrm>
-              <a:off x="3022201" y="2073503"/>
+              <a:off x="3019333" y="2073503"/>
               <a:ext cx="0" cy="3649639"/>
             </a:xfrm>
             <a:custGeom>
@@ -2572,7 +2572,7 @@
           </p:nvSpPr>
           <p:spPr>
             <a:xfrm>
-              <a:off x="3861838" y="2073503"/>
+              <a:off x="3857383" y="2073503"/>
               <a:ext cx="0" cy="3649639"/>
             </a:xfrm>
             <a:custGeom>
@@ -2615,7 +2615,7 @@
           </p:nvSpPr>
           <p:spPr>
             <a:xfrm>
-              <a:off x="4701474" y="2073503"/>
+              <a:off x="4695434" y="2073503"/>
               <a:ext cx="0" cy="3649639"/>
             </a:xfrm>
             <a:custGeom>
@@ -2658,7 +2658,7 @@
           </p:nvSpPr>
           <p:spPr>
             <a:xfrm>
-              <a:off x="5541110" y="2073503"/>
+              <a:off x="5533485" y="2073503"/>
               <a:ext cx="0" cy="3649639"/>
             </a:xfrm>
             <a:custGeom>
@@ -2701,7 +2701,7 @@
           </p:nvSpPr>
           <p:spPr>
             <a:xfrm>
-              <a:off x="6380746" y="2073503"/>
+              <a:off x="6371535" y="2073503"/>
               <a:ext cx="0" cy="3649639"/>
             </a:xfrm>
             <a:custGeom>
@@ -2744,7 +2744,7 @@
           </p:nvSpPr>
           <p:spPr>
             <a:xfrm>
-              <a:off x="7220382" y="2073503"/>
+              <a:off x="7209586" y="2073503"/>
               <a:ext cx="0" cy="3649639"/>
             </a:xfrm>
             <a:custGeom>
@@ -2787,7 +2787,7 @@
           </p:nvSpPr>
           <p:spPr>
             <a:xfrm>
-              <a:off x="8060018" y="2073503"/>
+              <a:off x="8047636" y="2073503"/>
               <a:ext cx="0" cy="3649639"/>
             </a:xfrm>
             <a:custGeom>
@@ -3045,7 +3045,7 @@
           </p:nvSpPr>
           <p:spPr>
             <a:xfrm>
-              <a:off x="923111" y="2073503"/>
+              <a:off x="924206" y="2073503"/>
               <a:ext cx="0" cy="3649639"/>
             </a:xfrm>
             <a:custGeom>
@@ -3088,7 +3088,7 @@
           </p:nvSpPr>
           <p:spPr>
             <a:xfrm>
-              <a:off x="1762747" y="2073503"/>
+              <a:off x="1762257" y="2073503"/>
               <a:ext cx="0" cy="3649639"/>
             </a:xfrm>
             <a:custGeom>
@@ -3131,7 +3131,7 @@
           </p:nvSpPr>
           <p:spPr>
             <a:xfrm>
-              <a:off x="2602383" y="2073503"/>
+              <a:off x="2600307" y="2073503"/>
               <a:ext cx="0" cy="3649639"/>
             </a:xfrm>
             <a:custGeom>
@@ -3174,7 +3174,7 @@
           </p:nvSpPr>
           <p:spPr>
             <a:xfrm>
-              <a:off x="3442019" y="2073503"/>
+              <a:off x="3438358" y="2073503"/>
               <a:ext cx="0" cy="3649639"/>
             </a:xfrm>
             <a:custGeom>
@@ -3217,7 +3217,7 @@
           </p:nvSpPr>
           <p:spPr>
             <a:xfrm>
-              <a:off x="4281656" y="2073503"/>
+              <a:off x="4276409" y="2073503"/>
               <a:ext cx="0" cy="3649639"/>
             </a:xfrm>
             <a:custGeom>
@@ -3260,7 +3260,7 @@
           </p:nvSpPr>
           <p:spPr>
             <a:xfrm>
-              <a:off x="5121292" y="2073503"/>
+              <a:off x="5114459" y="2073503"/>
               <a:ext cx="0" cy="3649639"/>
             </a:xfrm>
             <a:custGeom>
@@ -3303,7 +3303,7 @@
           </p:nvSpPr>
           <p:spPr>
             <a:xfrm>
-              <a:off x="5960928" y="2073503"/>
+              <a:off x="5952510" y="2073503"/>
               <a:ext cx="0" cy="3649639"/>
             </a:xfrm>
             <a:custGeom>
@@ -3346,7 +3346,7 @@
           </p:nvSpPr>
           <p:spPr>
             <a:xfrm>
-              <a:off x="6800564" y="2073503"/>
+              <a:off x="6790560" y="2073503"/>
               <a:ext cx="0" cy="3649639"/>
             </a:xfrm>
             <a:custGeom>
@@ -3389,7 +3389,7 @@
           </p:nvSpPr>
           <p:spPr>
             <a:xfrm>
-              <a:off x="7640200" y="2073503"/>
+              <a:off x="7628611" y="2073503"/>
               <a:ext cx="0" cy="3649639"/>
             </a:xfrm>
             <a:custGeom>
@@ -3432,7 +3432,7 @@
           </p:nvSpPr>
           <p:spPr>
             <a:xfrm>
-              <a:off x="8479836" y="2073503"/>
+              <a:off x="8466662" y="2073503"/>
               <a:ext cx="0" cy="3649639"/>
             </a:xfrm>
             <a:custGeom>
@@ -3476,527 +3476,527 @@
           <p:spPr>
             <a:xfrm>
               <a:off x="1172049" y="2073503"/>
-              <a:ext cx="7090630" cy="3474928"/>
+              <a:ext cx="7090630" cy="3474764"/>
             </a:xfrm>
             <a:custGeom>
               <a:avLst/>
               <a:pathLst>
-                <a:path w="7090630" h="3474928">
+                <a:path w="7090630" h="3474764">
                   <a:moveTo>
-                    <a:pt x="2010755" y="0"/>
+                    <a:pt x="2035051" y="0"/>
                   </a:moveTo>
                   <a:lnTo>
-                    <a:pt x="2077053" y="262268"/>
-                  </a:lnTo>
-                  <a:lnTo>
-                    <a:pt x="2148675" y="522694"/>
-                  </a:lnTo>
-                  <a:lnTo>
-                    <a:pt x="2220298" y="762067"/>
-                  </a:lnTo>
-                  <a:lnTo>
-                    <a:pt x="2291920" y="982089"/>
-                  </a:lnTo>
-                  <a:lnTo>
-                    <a:pt x="2363543" y="1184325"/>
-                  </a:lnTo>
-                  <a:lnTo>
-                    <a:pt x="2435165" y="1370211"/>
-                  </a:lnTo>
-                  <a:lnTo>
-                    <a:pt x="2506788" y="1541071"/>
-                  </a:lnTo>
-                  <a:lnTo>
-                    <a:pt x="2578410" y="1698118"/>
-                  </a:lnTo>
-                  <a:lnTo>
-                    <a:pt x="2650033" y="1842469"/>
-                  </a:lnTo>
-                  <a:lnTo>
-                    <a:pt x="2721655" y="1975151"/>
-                  </a:lnTo>
-                  <a:lnTo>
-                    <a:pt x="2793278" y="2097106"/>
-                  </a:lnTo>
-                  <a:lnTo>
-                    <a:pt x="2864901" y="2209203"/>
-                  </a:lnTo>
-                  <a:lnTo>
-                    <a:pt x="2936523" y="2312238"/>
-                  </a:lnTo>
-                  <a:lnTo>
-                    <a:pt x="3008146" y="2406943"/>
-                  </a:lnTo>
-                  <a:lnTo>
-                    <a:pt x="3079768" y="2493993"/>
-                  </a:lnTo>
-                  <a:lnTo>
-                    <a:pt x="3151391" y="2574005"/>
-                  </a:lnTo>
-                  <a:lnTo>
-                    <a:pt x="3223013" y="2647549"/>
-                  </a:lnTo>
-                  <a:lnTo>
-                    <a:pt x="3294636" y="2659582"/>
-                  </a:lnTo>
-                  <a:lnTo>
-                    <a:pt x="3366258" y="2665404"/>
-                  </a:lnTo>
-                  <a:lnTo>
-                    <a:pt x="3437881" y="2671185"/>
-                  </a:lnTo>
-                  <a:lnTo>
-                    <a:pt x="3509503" y="2676926"/>
-                  </a:lnTo>
-                  <a:lnTo>
-                    <a:pt x="3581126" y="2682625"/>
-                  </a:lnTo>
-                  <a:lnTo>
-                    <a:pt x="3652748" y="2688285"/>
-                  </a:lnTo>
-                  <a:lnTo>
-                    <a:pt x="3724371" y="2693904"/>
-                  </a:lnTo>
-                  <a:lnTo>
-                    <a:pt x="3795993" y="2699484"/>
-                  </a:lnTo>
-                  <a:lnTo>
-                    <a:pt x="3867616" y="2705024"/>
-                  </a:lnTo>
-                  <a:lnTo>
-                    <a:pt x="3939238" y="2710525"/>
-                  </a:lnTo>
-                  <a:lnTo>
-                    <a:pt x="4010861" y="2715987"/>
-                  </a:lnTo>
-                  <a:lnTo>
-                    <a:pt x="4082483" y="2721411"/>
-                  </a:lnTo>
-                  <a:lnTo>
-                    <a:pt x="4154106" y="2726796"/>
-                  </a:lnTo>
-                  <a:lnTo>
-                    <a:pt x="4225729" y="2732144"/>
-                  </a:lnTo>
-                  <a:lnTo>
-                    <a:pt x="4297351" y="2737453"/>
-                  </a:lnTo>
-                  <a:lnTo>
-                    <a:pt x="4368974" y="2742725"/>
-                  </a:lnTo>
-                  <a:lnTo>
-                    <a:pt x="4440596" y="2747960"/>
-                  </a:lnTo>
-                  <a:lnTo>
-                    <a:pt x="4512219" y="2753158"/>
-                  </a:lnTo>
-                  <a:lnTo>
-                    <a:pt x="4583841" y="2758319"/>
-                  </a:lnTo>
-                  <a:lnTo>
-                    <a:pt x="4655464" y="2763444"/>
-                  </a:lnTo>
-                  <a:lnTo>
-                    <a:pt x="4727086" y="2768532"/>
-                  </a:lnTo>
-                  <a:lnTo>
-                    <a:pt x="4798709" y="2773584"/>
-                  </a:lnTo>
-                  <a:lnTo>
-                    <a:pt x="4870331" y="2778601"/>
-                  </a:lnTo>
-                  <a:lnTo>
-                    <a:pt x="4941954" y="2783583"/>
-                  </a:lnTo>
-                  <a:lnTo>
-                    <a:pt x="5013576" y="2788529"/>
-                  </a:lnTo>
-                  <a:lnTo>
-                    <a:pt x="5085199" y="2793440"/>
-                  </a:lnTo>
-                  <a:lnTo>
-                    <a:pt x="5156821" y="2798317"/>
-                  </a:lnTo>
-                  <a:lnTo>
-                    <a:pt x="5228444" y="2803159"/>
-                  </a:lnTo>
-                  <a:lnTo>
-                    <a:pt x="5300066" y="2807966"/>
-                  </a:lnTo>
-                  <a:lnTo>
-                    <a:pt x="5371689" y="2812740"/>
-                  </a:lnTo>
-                  <a:lnTo>
-                    <a:pt x="5443311" y="2817481"/>
-                  </a:lnTo>
-                  <a:lnTo>
-                    <a:pt x="5514934" y="2822187"/>
-                  </a:lnTo>
-                  <a:lnTo>
-                    <a:pt x="5586557" y="2826861"/>
-                  </a:lnTo>
-                  <a:lnTo>
-                    <a:pt x="5658179" y="2831501"/>
-                  </a:lnTo>
-                  <a:lnTo>
-                    <a:pt x="5729802" y="2836109"/>
-                  </a:lnTo>
-                  <a:lnTo>
-                    <a:pt x="5801424" y="2840684"/>
-                  </a:lnTo>
-                  <a:lnTo>
-                    <a:pt x="5873047" y="2845227"/>
-                  </a:lnTo>
-                  <a:lnTo>
-                    <a:pt x="5944669" y="2849737"/>
-                  </a:lnTo>
-                  <a:lnTo>
-                    <a:pt x="6016292" y="2854216"/>
-                  </a:lnTo>
-                  <a:lnTo>
-                    <a:pt x="6087914" y="2858663"/>
-                  </a:lnTo>
-                  <a:lnTo>
-                    <a:pt x="6159537" y="2863079"/>
-                  </a:lnTo>
-                  <a:lnTo>
-                    <a:pt x="6231159" y="2867464"/>
-                  </a:lnTo>
-                  <a:lnTo>
-                    <a:pt x="6302782" y="2871817"/>
-                  </a:lnTo>
-                  <a:lnTo>
-                    <a:pt x="6374404" y="2876140"/>
-                  </a:lnTo>
-                  <a:lnTo>
-                    <a:pt x="6446027" y="2880433"/>
-                  </a:lnTo>
-                  <a:lnTo>
-                    <a:pt x="6517649" y="2884695"/>
-                  </a:lnTo>
-                  <a:lnTo>
-                    <a:pt x="6589272" y="2888926"/>
-                  </a:lnTo>
-                  <a:lnTo>
-                    <a:pt x="6660894" y="2893128"/>
-                  </a:lnTo>
-                  <a:lnTo>
-                    <a:pt x="6732517" y="2897301"/>
-                  </a:lnTo>
-                  <a:lnTo>
-                    <a:pt x="6804139" y="2901444"/>
-                  </a:lnTo>
-                  <a:lnTo>
-                    <a:pt x="6875762" y="2905557"/>
-                  </a:lnTo>
-                  <a:lnTo>
-                    <a:pt x="6947385" y="2909642"/>
-                  </a:lnTo>
-                  <a:lnTo>
-                    <a:pt x="7019007" y="2913697"/>
-                  </a:lnTo>
-                  <a:lnTo>
-                    <a:pt x="7090630" y="2917724"/>
-                  </a:lnTo>
-                  <a:lnTo>
-                    <a:pt x="7090630" y="3474928"/>
-                  </a:lnTo>
-                  <a:lnTo>
-                    <a:pt x="7019007" y="3474152"/>
-                  </a:lnTo>
-                  <a:lnTo>
-                    <a:pt x="6947385" y="3473308"/>
-                  </a:lnTo>
-                  <a:lnTo>
-                    <a:pt x="6875762" y="3472390"/>
-                  </a:lnTo>
-                  <a:lnTo>
-                    <a:pt x="6804139" y="3471391"/>
-                  </a:lnTo>
-                  <a:lnTo>
-                    <a:pt x="6732517" y="3470305"/>
-                  </a:lnTo>
-                  <a:lnTo>
-                    <a:pt x="6660894" y="3469122"/>
-                  </a:lnTo>
-                  <a:lnTo>
-                    <a:pt x="6589272" y="3467836"/>
-                  </a:lnTo>
-                  <a:lnTo>
-                    <a:pt x="6517649" y="3466437"/>
-                  </a:lnTo>
-                  <a:lnTo>
-                    <a:pt x="6446027" y="3464914"/>
-                  </a:lnTo>
-                  <a:lnTo>
-                    <a:pt x="6374404" y="3463258"/>
-                  </a:lnTo>
-                  <a:lnTo>
-                    <a:pt x="6302782" y="3461456"/>
-                  </a:lnTo>
-                  <a:lnTo>
-                    <a:pt x="6231159" y="3459496"/>
-                  </a:lnTo>
-                  <a:lnTo>
-                    <a:pt x="6159537" y="3457363"/>
-                  </a:lnTo>
-                  <a:lnTo>
-                    <a:pt x="6087914" y="3455042"/>
-                  </a:lnTo>
-                  <a:lnTo>
-                    <a:pt x="6016292" y="3452518"/>
-                  </a:lnTo>
-                  <a:lnTo>
-                    <a:pt x="5944669" y="3449771"/>
-                  </a:lnTo>
-                  <a:lnTo>
-                    <a:pt x="5873047" y="3446783"/>
-                  </a:lnTo>
-                  <a:lnTo>
-                    <a:pt x="5801424" y="3443532"/>
-                  </a:lnTo>
-                  <a:lnTo>
-                    <a:pt x="5729802" y="3439995"/>
-                  </a:lnTo>
-                  <a:lnTo>
-                    <a:pt x="5658179" y="3436147"/>
-                  </a:lnTo>
-                  <a:lnTo>
-                    <a:pt x="5586557" y="3431961"/>
-                  </a:lnTo>
-                  <a:lnTo>
-                    <a:pt x="5514934" y="3427407"/>
-                  </a:lnTo>
-                  <a:lnTo>
-                    <a:pt x="5443311" y="3422451"/>
-                  </a:lnTo>
-                  <a:lnTo>
-                    <a:pt x="5371689" y="3417060"/>
-                  </a:lnTo>
-                  <a:lnTo>
-                    <a:pt x="5300066" y="3411195"/>
-                  </a:lnTo>
-                  <a:lnTo>
-                    <a:pt x="5228444" y="3404815"/>
-                  </a:lnTo>
-                  <a:lnTo>
-                    <a:pt x="5156821" y="3397872"/>
-                  </a:lnTo>
-                  <a:lnTo>
-                    <a:pt x="5085199" y="3390320"/>
-                  </a:lnTo>
-                  <a:lnTo>
-                    <a:pt x="5013576" y="3382103"/>
-                  </a:lnTo>
-                  <a:lnTo>
-                    <a:pt x="4941954" y="3373163"/>
-                  </a:lnTo>
-                  <a:lnTo>
-                    <a:pt x="4870331" y="3363437"/>
-                  </a:lnTo>
-                  <a:lnTo>
-                    <a:pt x="4798709" y="3352856"/>
-                  </a:lnTo>
-                  <a:lnTo>
-                    <a:pt x="4727086" y="3341344"/>
-                  </a:lnTo>
-                  <a:lnTo>
-                    <a:pt x="4655464" y="3328820"/>
-                  </a:lnTo>
-                  <a:lnTo>
-                    <a:pt x="4583841" y="3315194"/>
-                  </a:lnTo>
-                  <a:lnTo>
-                    <a:pt x="4512219" y="3300370"/>
-                  </a:lnTo>
-                  <a:lnTo>
-                    <a:pt x="4440596" y="3284242"/>
-                  </a:lnTo>
-                  <a:lnTo>
-                    <a:pt x="4368974" y="3266695"/>
-                  </a:lnTo>
-                  <a:lnTo>
-                    <a:pt x="4297351" y="3247605"/>
-                  </a:lnTo>
-                  <a:lnTo>
-                    <a:pt x="4225729" y="3226837"/>
-                  </a:lnTo>
-                  <a:lnTo>
-                    <a:pt x="4154106" y="3204241"/>
-                  </a:lnTo>
-                  <a:lnTo>
-                    <a:pt x="4082483" y="3179659"/>
-                  </a:lnTo>
-                  <a:lnTo>
-                    <a:pt x="4010861" y="3152914"/>
-                  </a:lnTo>
-                  <a:lnTo>
-                    <a:pt x="3939238" y="3123817"/>
-                  </a:lnTo>
-                  <a:lnTo>
-                    <a:pt x="3867616" y="3092161"/>
-                  </a:lnTo>
-                  <a:lnTo>
-                    <a:pt x="3795993" y="3057721"/>
-                  </a:lnTo>
-                  <a:lnTo>
-                    <a:pt x="3724371" y="3020252"/>
-                  </a:lnTo>
-                  <a:lnTo>
-                    <a:pt x="3652748" y="2979487"/>
-                  </a:lnTo>
-                  <a:lnTo>
-                    <a:pt x="3581126" y="2935137"/>
-                  </a:lnTo>
-                  <a:lnTo>
-                    <a:pt x="3509503" y="2886887"/>
-                  </a:lnTo>
-                  <a:lnTo>
-                    <a:pt x="3437881" y="2834393"/>
-                  </a:lnTo>
-                  <a:lnTo>
-                    <a:pt x="3366258" y="2777282"/>
-                  </a:lnTo>
-                  <a:lnTo>
-                    <a:pt x="3294636" y="2715148"/>
-                  </a:lnTo>
-                  <a:lnTo>
-                    <a:pt x="3223013" y="2653719"/>
-                  </a:lnTo>
-                  <a:lnTo>
-                    <a:pt x="3151391" y="2647813"/>
-                  </a:lnTo>
-                  <a:lnTo>
-                    <a:pt x="3079768" y="2641866"/>
-                  </a:lnTo>
-                  <a:lnTo>
-                    <a:pt x="3008146" y="2635876"/>
-                  </a:lnTo>
-                  <a:lnTo>
-                    <a:pt x="2936523" y="2629844"/>
-                  </a:lnTo>
-                  <a:lnTo>
-                    <a:pt x="2864901" y="2623769"/>
-                  </a:lnTo>
-                  <a:lnTo>
-                    <a:pt x="2793278" y="2617651"/>
-                  </a:lnTo>
-                  <a:lnTo>
-                    <a:pt x="2721655" y="2611489"/>
-                  </a:lnTo>
-                  <a:lnTo>
-                    <a:pt x="2650033" y="2605283"/>
-                  </a:lnTo>
-                  <a:lnTo>
-                    <a:pt x="2578410" y="2599033"/>
-                  </a:lnTo>
-                  <a:lnTo>
-                    <a:pt x="2506788" y="2592739"/>
-                  </a:lnTo>
-                  <a:lnTo>
-                    <a:pt x="2435165" y="2586400"/>
-                  </a:lnTo>
-                  <a:lnTo>
-                    <a:pt x="2363543" y="2580016"/>
-                  </a:lnTo>
-                  <a:lnTo>
-                    <a:pt x="2291920" y="2573586"/>
-                  </a:lnTo>
-                  <a:lnTo>
-                    <a:pt x="2220298" y="2567111"/>
-                  </a:lnTo>
-                  <a:lnTo>
-                    <a:pt x="2148675" y="2560589"/>
-                  </a:lnTo>
-                  <a:lnTo>
-                    <a:pt x="2077053" y="2554021"/>
-                  </a:lnTo>
-                  <a:lnTo>
-                    <a:pt x="2005430" y="2547407"/>
-                  </a:lnTo>
-                  <a:lnTo>
-                    <a:pt x="1933808" y="2540745"/>
-                  </a:lnTo>
-                  <a:lnTo>
-                    <a:pt x="1862185" y="2534036"/>
-                  </a:lnTo>
-                  <a:lnTo>
-                    <a:pt x="1790563" y="2527279"/>
-                  </a:lnTo>
-                  <a:lnTo>
-                    <a:pt x="1718940" y="2520474"/>
-                  </a:lnTo>
-                  <a:lnTo>
-                    <a:pt x="1647318" y="2513621"/>
-                  </a:lnTo>
-                  <a:lnTo>
-                    <a:pt x="1575695" y="2506719"/>
-                  </a:lnTo>
-                  <a:lnTo>
-                    <a:pt x="1504073" y="2499768"/>
-                  </a:lnTo>
-                  <a:lnTo>
-                    <a:pt x="1432450" y="2492767"/>
-                  </a:lnTo>
-                  <a:lnTo>
-                    <a:pt x="1360827" y="2485717"/>
-                  </a:lnTo>
-                  <a:lnTo>
-                    <a:pt x="1289205" y="2478616"/>
-                  </a:lnTo>
-                  <a:lnTo>
-                    <a:pt x="1217582" y="2471465"/>
-                  </a:lnTo>
-                  <a:lnTo>
-                    <a:pt x="1145960" y="2464263"/>
-                  </a:lnTo>
-                  <a:lnTo>
-                    <a:pt x="1074337" y="2457010"/>
-                  </a:lnTo>
-                  <a:lnTo>
-                    <a:pt x="1002715" y="2449706"/>
-                  </a:lnTo>
-                  <a:lnTo>
-                    <a:pt x="931092" y="2442349"/>
-                  </a:lnTo>
-                  <a:lnTo>
-                    <a:pt x="859470" y="2434940"/>
-                  </a:lnTo>
-                  <a:lnTo>
-                    <a:pt x="787847" y="2427478"/>
-                  </a:lnTo>
-                  <a:lnTo>
-                    <a:pt x="716225" y="2419963"/>
-                  </a:lnTo>
-                  <a:lnTo>
-                    <a:pt x="644602" y="2412395"/>
-                  </a:lnTo>
-                  <a:lnTo>
-                    <a:pt x="572980" y="2404772"/>
-                  </a:lnTo>
-                  <a:lnTo>
-                    <a:pt x="501357" y="2397096"/>
-                  </a:lnTo>
-                  <a:lnTo>
-                    <a:pt x="429735" y="2389365"/>
-                  </a:lnTo>
-                  <a:lnTo>
-                    <a:pt x="358112" y="2381579"/>
-                  </a:lnTo>
-                  <a:lnTo>
-                    <a:pt x="286490" y="2373738"/>
-                  </a:lnTo>
-                  <a:lnTo>
-                    <a:pt x="214867" y="2365840"/>
-                  </a:lnTo>
-                  <a:lnTo>
-                    <a:pt x="143245" y="2357887"/>
-                  </a:lnTo>
-                  <a:lnTo>
-                    <a:pt x="71622" y="2349877"/>
-                  </a:lnTo>
-                  <a:lnTo>
-                    <a:pt x="0" y="2341810"/>
+                    <a:pt x="2077053" y="171141"/>
+                  </a:lnTo>
+                  <a:lnTo>
+                    <a:pt x="2148675" y="439348"/>
+                  </a:lnTo>
+                  <a:lnTo>
+                    <a:pt x="2220298" y="685840"/>
+                  </a:lnTo>
+                  <a:lnTo>
+                    <a:pt x="2291920" y="912375"/>
+                  </a:lnTo>
+                  <a:lnTo>
+                    <a:pt x="2363543" y="1120568"/>
+                  </a:lnTo>
+                  <a:lnTo>
+                    <a:pt x="2435165" y="1311904"/>
+                  </a:lnTo>
+                  <a:lnTo>
+                    <a:pt x="2506788" y="1487749"/>
+                  </a:lnTo>
+                  <a:lnTo>
+                    <a:pt x="2578410" y="1649356"/>
+                  </a:lnTo>
+                  <a:lnTo>
+                    <a:pt x="2650033" y="1797879"/>
+                  </a:lnTo>
+                  <a:lnTo>
+                    <a:pt x="2721655" y="1934377"/>
+                  </a:lnTo>
+                  <a:lnTo>
+                    <a:pt x="2793278" y="2059822"/>
+                  </a:lnTo>
+                  <a:lnTo>
+                    <a:pt x="2864901" y="2175112"/>
+                  </a:lnTo>
+                  <a:lnTo>
+                    <a:pt x="2936523" y="2281066"/>
+                  </a:lnTo>
+                  <a:lnTo>
+                    <a:pt x="3008146" y="2378442"/>
+                  </a:lnTo>
+                  <a:lnTo>
+                    <a:pt x="3079768" y="2467934"/>
+                  </a:lnTo>
+                  <a:lnTo>
+                    <a:pt x="3151391" y="2550180"/>
+                  </a:lnTo>
+                  <a:lnTo>
+                    <a:pt x="3223013" y="2625767"/>
+                  </a:lnTo>
+                  <a:lnTo>
+                    <a:pt x="3294636" y="2658339"/>
+                  </a:lnTo>
+                  <a:lnTo>
+                    <a:pt x="3366258" y="2665059"/>
+                  </a:lnTo>
+                  <a:lnTo>
+                    <a:pt x="3437881" y="2671725"/>
+                  </a:lnTo>
+                  <a:lnTo>
+                    <a:pt x="3509503" y="2678336"/>
+                  </a:lnTo>
+                  <a:lnTo>
+                    <a:pt x="3581126" y="2684893"/>
+                  </a:lnTo>
+                  <a:lnTo>
+                    <a:pt x="3652748" y="2691397"/>
+                  </a:lnTo>
+                  <a:lnTo>
+                    <a:pt x="3724371" y="2697848"/>
+                  </a:lnTo>
+                  <a:lnTo>
+                    <a:pt x="3795993" y="2704247"/>
+                  </a:lnTo>
+                  <a:lnTo>
+                    <a:pt x="3867616" y="2710593"/>
+                  </a:lnTo>
+                  <a:lnTo>
+                    <a:pt x="3939238" y="2716888"/>
+                  </a:lnTo>
+                  <a:lnTo>
+                    <a:pt x="4010861" y="2723131"/>
+                  </a:lnTo>
+                  <a:lnTo>
+                    <a:pt x="4082483" y="2729324"/>
+                  </a:lnTo>
+                  <a:lnTo>
+                    <a:pt x="4154106" y="2735466"/>
+                  </a:lnTo>
+                  <a:lnTo>
+                    <a:pt x="4225729" y="2741558"/>
+                  </a:lnTo>
+                  <a:lnTo>
+                    <a:pt x="4297351" y="2747601"/>
+                  </a:lnTo>
+                  <a:lnTo>
+                    <a:pt x="4368974" y="2753594"/>
+                  </a:lnTo>
+                  <a:lnTo>
+                    <a:pt x="4440596" y="2759539"/>
+                  </a:lnTo>
+                  <a:lnTo>
+                    <a:pt x="4512219" y="2765435"/>
+                  </a:lnTo>
+                  <a:lnTo>
+                    <a:pt x="4583841" y="2771283"/>
+                  </a:lnTo>
+                  <a:lnTo>
+                    <a:pt x="4655464" y="2777084"/>
+                  </a:lnTo>
+                  <a:lnTo>
+                    <a:pt x="4727086" y="2782837"/>
+                  </a:lnTo>
+                  <a:lnTo>
+                    <a:pt x="4798709" y="2788544"/>
+                  </a:lnTo>
+                  <a:lnTo>
+                    <a:pt x="4870331" y="2794204"/>
+                  </a:lnTo>
+                  <a:lnTo>
+                    <a:pt x="4941954" y="2799818"/>
+                  </a:lnTo>
+                  <a:lnTo>
+                    <a:pt x="5013576" y="2805386"/>
+                  </a:lnTo>
+                  <a:lnTo>
+                    <a:pt x="5085199" y="2810909"/>
+                  </a:lnTo>
+                  <a:lnTo>
+                    <a:pt x="5156821" y="2816387"/>
+                  </a:lnTo>
+                  <a:lnTo>
+                    <a:pt x="5228444" y="2821821"/>
+                  </a:lnTo>
+                  <a:lnTo>
+                    <a:pt x="5300066" y="2827210"/>
+                  </a:lnTo>
+                  <a:lnTo>
+                    <a:pt x="5371689" y="2832555"/>
+                  </a:lnTo>
+                  <a:lnTo>
+                    <a:pt x="5443311" y="2837857"/>
+                  </a:lnTo>
+                  <a:lnTo>
+                    <a:pt x="5514934" y="2843115"/>
+                  </a:lnTo>
+                  <a:lnTo>
+                    <a:pt x="5586557" y="2848331"/>
+                  </a:lnTo>
+                  <a:lnTo>
+                    <a:pt x="5658179" y="2853505"/>
+                  </a:lnTo>
+                  <a:lnTo>
+                    <a:pt x="5729802" y="2858636"/>
+                  </a:lnTo>
+                  <a:lnTo>
+                    <a:pt x="5801424" y="2863725"/>
+                  </a:lnTo>
+                  <a:lnTo>
+                    <a:pt x="5873047" y="2868773"/>
+                  </a:lnTo>
+                  <a:lnTo>
+                    <a:pt x="5944669" y="2873780"/>
+                  </a:lnTo>
+                  <a:lnTo>
+                    <a:pt x="6016292" y="2878746"/>
+                  </a:lnTo>
+                  <a:lnTo>
+                    <a:pt x="6087914" y="2883672"/>
+                  </a:lnTo>
+                  <a:lnTo>
+                    <a:pt x="6159537" y="2888557"/>
+                  </a:lnTo>
+                  <a:lnTo>
+                    <a:pt x="6231159" y="2893403"/>
+                  </a:lnTo>
+                  <a:lnTo>
+                    <a:pt x="6302782" y="2898210"/>
+                  </a:lnTo>
+                  <a:lnTo>
+                    <a:pt x="6374404" y="2902977"/>
+                  </a:lnTo>
+                  <a:lnTo>
+                    <a:pt x="6446027" y="2907705"/>
+                  </a:lnTo>
+                  <a:lnTo>
+                    <a:pt x="6517649" y="2912395"/>
+                  </a:lnTo>
+                  <a:lnTo>
+                    <a:pt x="6589272" y="2917047"/>
+                  </a:lnTo>
+                  <a:lnTo>
+                    <a:pt x="6660894" y="2921661"/>
+                  </a:lnTo>
+                  <a:lnTo>
+                    <a:pt x="6732517" y="2926237"/>
+                  </a:lnTo>
+                  <a:lnTo>
+                    <a:pt x="6804139" y="2930776"/>
+                  </a:lnTo>
+                  <a:lnTo>
+                    <a:pt x="6875762" y="2935278"/>
+                  </a:lnTo>
+                  <a:lnTo>
+                    <a:pt x="6947385" y="2939743"/>
+                  </a:lnTo>
+                  <a:lnTo>
+                    <a:pt x="7019007" y="2944173"/>
+                  </a:lnTo>
+                  <a:lnTo>
+                    <a:pt x="7090630" y="2948566"/>
+                  </a:lnTo>
+                  <a:lnTo>
+                    <a:pt x="7090630" y="3474764"/>
+                  </a:lnTo>
+                  <a:lnTo>
+                    <a:pt x="7019007" y="3473973"/>
+                  </a:lnTo>
+                  <a:lnTo>
+                    <a:pt x="6947385" y="3473112"/>
+                  </a:lnTo>
+                  <a:lnTo>
+                    <a:pt x="6875762" y="3472175"/>
+                  </a:lnTo>
+                  <a:lnTo>
+                    <a:pt x="6804139" y="3471155"/>
+                  </a:lnTo>
+                  <a:lnTo>
+                    <a:pt x="6732517" y="3470046"/>
+                  </a:lnTo>
+                  <a:lnTo>
+                    <a:pt x="6660894" y="3468839"/>
+                  </a:lnTo>
+                  <a:lnTo>
+                    <a:pt x="6589272" y="3467526"/>
+                  </a:lnTo>
+                  <a:lnTo>
+                    <a:pt x="6517649" y="3466097"/>
+                  </a:lnTo>
+                  <a:lnTo>
+                    <a:pt x="6446027" y="3464542"/>
+                  </a:lnTo>
+                  <a:lnTo>
+                    <a:pt x="6374404" y="3462850"/>
+                  </a:lnTo>
+                  <a:lnTo>
+                    <a:pt x="6302782" y="3461009"/>
+                  </a:lnTo>
+                  <a:lnTo>
+                    <a:pt x="6231159" y="3459006"/>
+                  </a:lnTo>
+                  <a:lnTo>
+                    <a:pt x="6159537" y="3456826"/>
+                  </a:lnTo>
+                  <a:lnTo>
+                    <a:pt x="6087914" y="3454455"/>
+                  </a:lnTo>
+                  <a:lnTo>
+                    <a:pt x="6016292" y="3451874"/>
+                  </a:lnTo>
+                  <a:lnTo>
+                    <a:pt x="5944669" y="3449066"/>
+                  </a:lnTo>
+                  <a:lnTo>
+                    <a:pt x="5873047" y="3446011"/>
+                  </a:lnTo>
+                  <a:lnTo>
+                    <a:pt x="5801424" y="3442686"/>
+                  </a:lnTo>
+                  <a:lnTo>
+                    <a:pt x="5729802" y="3439069"/>
+                  </a:lnTo>
+                  <a:lnTo>
+                    <a:pt x="5658179" y="3435133"/>
+                  </a:lnTo>
+                  <a:lnTo>
+                    <a:pt x="5586557" y="3430850"/>
+                  </a:lnTo>
+                  <a:lnTo>
+                    <a:pt x="5514934" y="3426190"/>
+                  </a:lnTo>
+                  <a:lnTo>
+                    <a:pt x="5443311" y="3421120"/>
+                  </a:lnTo>
+                  <a:lnTo>
+                    <a:pt x="5371689" y="3415602"/>
+                  </a:lnTo>
+                  <a:lnTo>
+                    <a:pt x="5300066" y="3409599"/>
+                  </a:lnTo>
+                  <a:lnTo>
+                    <a:pt x="5228444" y="3403067"/>
+                  </a:lnTo>
+                  <a:lnTo>
+                    <a:pt x="5156821" y="3395959"/>
+                  </a:lnTo>
+                  <a:lnTo>
+                    <a:pt x="5085199" y="3388225"/>
+                  </a:lnTo>
+                  <a:lnTo>
+                    <a:pt x="5013576" y="3379810"/>
+                  </a:lnTo>
+                  <a:lnTo>
+                    <a:pt x="4941954" y="3370653"/>
+                  </a:lnTo>
+                  <a:lnTo>
+                    <a:pt x="4870331" y="3360689"/>
+                  </a:lnTo>
+                  <a:lnTo>
+                    <a:pt x="4798709" y="3349848"/>
+                  </a:lnTo>
+                  <a:lnTo>
+                    <a:pt x="4727086" y="3338052"/>
+                  </a:lnTo>
+                  <a:lnTo>
+                    <a:pt x="4655464" y="3325217"/>
+                  </a:lnTo>
+                  <a:lnTo>
+                    <a:pt x="4583841" y="3311250"/>
+                  </a:lnTo>
+                  <a:lnTo>
+                    <a:pt x="4512219" y="3296054"/>
+                  </a:lnTo>
+                  <a:lnTo>
+                    <a:pt x="4440596" y="3279518"/>
+                  </a:lnTo>
+                  <a:lnTo>
+                    <a:pt x="4368974" y="3261526"/>
+                  </a:lnTo>
+                  <a:lnTo>
+                    <a:pt x="4297351" y="3241948"/>
+                  </a:lnTo>
+                  <a:lnTo>
+                    <a:pt x="4225729" y="3220646"/>
+                  </a:lnTo>
+                  <a:lnTo>
+                    <a:pt x="4154106" y="3197468"/>
+                  </a:lnTo>
+                  <a:lnTo>
+                    <a:pt x="4082483" y="3172247"/>
+                  </a:lnTo>
+                  <a:lnTo>
+                    <a:pt x="4010861" y="3144804"/>
+                  </a:lnTo>
+                  <a:lnTo>
+                    <a:pt x="3939238" y="3114944"/>
+                  </a:lnTo>
+                  <a:lnTo>
+                    <a:pt x="3867616" y="3082453"/>
+                  </a:lnTo>
+                  <a:lnTo>
+                    <a:pt x="3795993" y="3047099"/>
+                  </a:lnTo>
+                  <a:lnTo>
+                    <a:pt x="3724371" y="3008631"/>
+                  </a:lnTo>
+                  <a:lnTo>
+                    <a:pt x="3652748" y="2966774"/>
+                  </a:lnTo>
+                  <a:lnTo>
+                    <a:pt x="3581126" y="2921230"/>
+                  </a:lnTo>
+                  <a:lnTo>
+                    <a:pt x="3509503" y="2871673"/>
+                  </a:lnTo>
+                  <a:lnTo>
+                    <a:pt x="3437881" y="2817750"/>
+                  </a:lnTo>
+                  <a:lnTo>
+                    <a:pt x="3366258" y="2759076"/>
+                  </a:lnTo>
+                  <a:lnTo>
+                    <a:pt x="3294636" y="2695234"/>
+                  </a:lnTo>
+                  <a:lnTo>
+                    <a:pt x="3223013" y="2651564"/>
+                  </a:lnTo>
+                  <a:lnTo>
+                    <a:pt x="3151391" y="2644733"/>
+                  </a:lnTo>
+                  <a:lnTo>
+                    <a:pt x="3079768" y="2637846"/>
+                  </a:lnTo>
+                  <a:lnTo>
+                    <a:pt x="3008146" y="2630902"/>
+                  </a:lnTo>
+                  <a:lnTo>
+                    <a:pt x="2936523" y="2623902"/>
+                  </a:lnTo>
+                  <a:lnTo>
+                    <a:pt x="2864901" y="2616844"/>
+                  </a:lnTo>
+                  <a:lnTo>
+                    <a:pt x="2793278" y="2609728"/>
+                  </a:lnTo>
+                  <a:lnTo>
+                    <a:pt x="2721655" y="2602554"/>
+                  </a:lnTo>
+                  <a:lnTo>
+                    <a:pt x="2650033" y="2595320"/>
+                  </a:lnTo>
+                  <a:lnTo>
+                    <a:pt x="2578410" y="2588028"/>
+                  </a:lnTo>
+                  <a:lnTo>
+                    <a:pt x="2506788" y="2580675"/>
+                  </a:lnTo>
+                  <a:lnTo>
+                    <a:pt x="2435165" y="2573262"/>
+                  </a:lnTo>
+                  <a:lnTo>
+                    <a:pt x="2363543" y="2565789"/>
+                  </a:lnTo>
+                  <a:lnTo>
+                    <a:pt x="2291920" y="2558254"/>
+                  </a:lnTo>
+                  <a:lnTo>
+                    <a:pt x="2220298" y="2550657"/>
+                  </a:lnTo>
+                  <a:lnTo>
+                    <a:pt x="2148675" y="2542998"/>
+                  </a:lnTo>
+                  <a:lnTo>
+                    <a:pt x="2077053" y="2535276"/>
+                  </a:lnTo>
+                  <a:lnTo>
+                    <a:pt x="2005430" y="2527490"/>
+                  </a:lnTo>
+                  <a:lnTo>
+                    <a:pt x="1933808" y="2519641"/>
+                  </a:lnTo>
+                  <a:lnTo>
+                    <a:pt x="1862185" y="2511727"/>
+                  </a:lnTo>
+                  <a:lnTo>
+                    <a:pt x="1790563" y="2503748"/>
+                  </a:lnTo>
+                  <a:lnTo>
+                    <a:pt x="1718940" y="2495704"/>
+                  </a:lnTo>
+                  <a:lnTo>
+                    <a:pt x="1647318" y="2487594"/>
+                  </a:lnTo>
+                  <a:lnTo>
+                    <a:pt x="1575695" y="2479417"/>
+                  </a:lnTo>
+                  <a:lnTo>
+                    <a:pt x="1504073" y="2471173"/>
+                  </a:lnTo>
+                  <a:lnTo>
+                    <a:pt x="1432450" y="2462861"/>
+                  </a:lnTo>
+                  <a:lnTo>
+                    <a:pt x="1360827" y="2454481"/>
+                  </a:lnTo>
+                  <a:lnTo>
+                    <a:pt x="1289205" y="2446032"/>
+                  </a:lnTo>
+                  <a:lnTo>
+                    <a:pt x="1217582" y="2437514"/>
+                  </a:lnTo>
+                  <a:lnTo>
+                    <a:pt x="1145960" y="2428926"/>
+                  </a:lnTo>
+                  <a:lnTo>
+                    <a:pt x="1074337" y="2420268"/>
+                  </a:lnTo>
+                  <a:lnTo>
+                    <a:pt x="1002715" y="2411538"/>
+                  </a:lnTo>
+                  <a:lnTo>
+                    <a:pt x="931092" y="2402737"/>
+                  </a:lnTo>
+                  <a:lnTo>
+                    <a:pt x="859470" y="2393864"/>
+                  </a:lnTo>
+                  <a:lnTo>
+                    <a:pt x="787847" y="2384918"/>
+                  </a:lnTo>
+                  <a:lnTo>
+                    <a:pt x="716225" y="2375898"/>
+                  </a:lnTo>
+                  <a:lnTo>
+                    <a:pt x="644602" y="2366804"/>
+                  </a:lnTo>
+                  <a:lnTo>
+                    <a:pt x="572980" y="2357636"/>
+                  </a:lnTo>
+                  <a:lnTo>
+                    <a:pt x="501357" y="2348392"/>
+                  </a:lnTo>
+                  <a:lnTo>
+                    <a:pt x="429735" y="2339073"/>
+                  </a:lnTo>
+                  <a:lnTo>
+                    <a:pt x="358112" y="2329677"/>
+                  </a:lnTo>
+                  <a:lnTo>
+                    <a:pt x="286490" y="2320204"/>
+                  </a:lnTo>
+                  <a:lnTo>
+                    <a:pt x="214867" y="2310653"/>
+                  </a:lnTo>
+                  <a:lnTo>
+                    <a:pt x="143245" y="2301023"/>
+                  </a:lnTo>
+                  <a:lnTo>
+                    <a:pt x="71622" y="2291315"/>
+                  </a:lnTo>
+                  <a:lnTo>
+                    <a:pt x="0" y="2281527"/>
                   </a:lnTo>
                   <a:lnTo>
                     <a:pt x="0" y="0"/>
@@ -4025,228 +4025,228 @@
           </p:nvSpPr>
           <p:spPr>
             <a:xfrm>
-              <a:off x="3182804" y="2073503"/>
-              <a:ext cx="5079875" cy="2917724"/>
+              <a:off x="3207101" y="2073503"/>
+              <a:ext cx="5055578" cy="2948566"/>
             </a:xfrm>
             <a:custGeom>
               <a:avLst/>
               <a:pathLst>
-                <a:path w="5079875" h="2917724">
+                <a:path w="5055578" h="2948566">
                   <a:moveTo>
                     <a:pt x="0" y="0"/>
                   </a:moveTo>
                   <a:lnTo>
-                    <a:pt x="66298" y="262268"/>
-                  </a:lnTo>
-                  <a:lnTo>
-                    <a:pt x="137920" y="522694"/>
-                  </a:lnTo>
-                  <a:lnTo>
-                    <a:pt x="209543" y="762067"/>
-                  </a:lnTo>
-                  <a:lnTo>
-                    <a:pt x="281165" y="982089"/>
-                  </a:lnTo>
-                  <a:lnTo>
-                    <a:pt x="352788" y="1184325"/>
-                  </a:lnTo>
-                  <a:lnTo>
-                    <a:pt x="424410" y="1370211"/>
-                  </a:lnTo>
-                  <a:lnTo>
-                    <a:pt x="496033" y="1541071"/>
-                  </a:lnTo>
-                  <a:lnTo>
-                    <a:pt x="567655" y="1698118"/>
-                  </a:lnTo>
-                  <a:lnTo>
-                    <a:pt x="639278" y="1842469"/>
-                  </a:lnTo>
-                  <a:lnTo>
-                    <a:pt x="710900" y="1975151"/>
-                  </a:lnTo>
-                  <a:lnTo>
-                    <a:pt x="782523" y="2097106"/>
-                  </a:lnTo>
-                  <a:lnTo>
-                    <a:pt x="854145" y="2209203"/>
-                  </a:lnTo>
-                  <a:lnTo>
-                    <a:pt x="925768" y="2312238"/>
-                  </a:lnTo>
-                  <a:lnTo>
-                    <a:pt x="997391" y="2406943"/>
-                  </a:lnTo>
-                  <a:lnTo>
-                    <a:pt x="1069013" y="2493993"/>
-                  </a:lnTo>
-                  <a:lnTo>
-                    <a:pt x="1140636" y="2574005"/>
-                  </a:lnTo>
-                  <a:lnTo>
-                    <a:pt x="1212258" y="2647549"/>
-                  </a:lnTo>
-                  <a:lnTo>
-                    <a:pt x="1283881" y="2659582"/>
-                  </a:lnTo>
-                  <a:lnTo>
-                    <a:pt x="1355503" y="2665404"/>
-                  </a:lnTo>
-                  <a:lnTo>
-                    <a:pt x="1427126" y="2671185"/>
-                  </a:lnTo>
-                  <a:lnTo>
-                    <a:pt x="1498748" y="2676926"/>
-                  </a:lnTo>
-                  <a:lnTo>
-                    <a:pt x="1570371" y="2682625"/>
-                  </a:lnTo>
-                  <a:lnTo>
-                    <a:pt x="1641993" y="2688285"/>
-                  </a:lnTo>
-                  <a:lnTo>
-                    <a:pt x="1713616" y="2693904"/>
-                  </a:lnTo>
-                  <a:lnTo>
-                    <a:pt x="1785238" y="2699484"/>
-                  </a:lnTo>
-                  <a:lnTo>
-                    <a:pt x="1856861" y="2705024"/>
-                  </a:lnTo>
-                  <a:lnTo>
-                    <a:pt x="1928483" y="2710525"/>
-                  </a:lnTo>
-                  <a:lnTo>
-                    <a:pt x="2000106" y="2715987"/>
-                  </a:lnTo>
-                  <a:lnTo>
-                    <a:pt x="2071728" y="2721411"/>
-                  </a:lnTo>
-                  <a:lnTo>
-                    <a:pt x="2143351" y="2726796"/>
-                  </a:lnTo>
-                  <a:lnTo>
-                    <a:pt x="2214973" y="2732144"/>
-                  </a:lnTo>
-                  <a:lnTo>
-                    <a:pt x="2286596" y="2737453"/>
-                  </a:lnTo>
-                  <a:lnTo>
-                    <a:pt x="2358219" y="2742725"/>
-                  </a:lnTo>
-                  <a:lnTo>
-                    <a:pt x="2429841" y="2747960"/>
-                  </a:lnTo>
-                  <a:lnTo>
-                    <a:pt x="2501464" y="2753158"/>
-                  </a:lnTo>
-                  <a:lnTo>
-                    <a:pt x="2573086" y="2758319"/>
-                  </a:lnTo>
-                  <a:lnTo>
-                    <a:pt x="2644709" y="2763444"/>
-                  </a:lnTo>
-                  <a:lnTo>
-                    <a:pt x="2716331" y="2768532"/>
-                  </a:lnTo>
-                  <a:lnTo>
-                    <a:pt x="2787954" y="2773584"/>
-                  </a:lnTo>
-                  <a:lnTo>
-                    <a:pt x="2859576" y="2778601"/>
-                  </a:lnTo>
-                  <a:lnTo>
-                    <a:pt x="2931199" y="2783583"/>
-                  </a:lnTo>
-                  <a:lnTo>
-                    <a:pt x="3002821" y="2788529"/>
-                  </a:lnTo>
-                  <a:lnTo>
-                    <a:pt x="3074444" y="2793440"/>
-                  </a:lnTo>
-                  <a:lnTo>
-                    <a:pt x="3146066" y="2798317"/>
-                  </a:lnTo>
-                  <a:lnTo>
-                    <a:pt x="3217689" y="2803159"/>
-                  </a:lnTo>
-                  <a:lnTo>
-                    <a:pt x="3289311" y="2807966"/>
-                  </a:lnTo>
-                  <a:lnTo>
-                    <a:pt x="3360934" y="2812740"/>
-                  </a:lnTo>
-                  <a:lnTo>
-                    <a:pt x="3432556" y="2817481"/>
-                  </a:lnTo>
-                  <a:lnTo>
-                    <a:pt x="3504179" y="2822187"/>
-                  </a:lnTo>
-                  <a:lnTo>
-                    <a:pt x="3575801" y="2826861"/>
-                  </a:lnTo>
-                  <a:lnTo>
-                    <a:pt x="3647424" y="2831501"/>
-                  </a:lnTo>
-                  <a:lnTo>
-                    <a:pt x="3719047" y="2836109"/>
-                  </a:lnTo>
-                  <a:lnTo>
-                    <a:pt x="3790669" y="2840684"/>
-                  </a:lnTo>
-                  <a:lnTo>
-                    <a:pt x="3862292" y="2845227"/>
-                  </a:lnTo>
-                  <a:lnTo>
-                    <a:pt x="3933914" y="2849737"/>
-                  </a:lnTo>
-                  <a:lnTo>
-                    <a:pt x="4005537" y="2854216"/>
-                  </a:lnTo>
-                  <a:lnTo>
-                    <a:pt x="4077159" y="2858663"/>
-                  </a:lnTo>
-                  <a:lnTo>
-                    <a:pt x="4148782" y="2863079"/>
-                  </a:lnTo>
-                  <a:lnTo>
-                    <a:pt x="4220404" y="2867464"/>
-                  </a:lnTo>
-                  <a:lnTo>
-                    <a:pt x="4292027" y="2871817"/>
-                  </a:lnTo>
-                  <a:lnTo>
-                    <a:pt x="4363649" y="2876140"/>
-                  </a:lnTo>
-                  <a:lnTo>
-                    <a:pt x="4435272" y="2880433"/>
-                  </a:lnTo>
-                  <a:lnTo>
-                    <a:pt x="4506894" y="2884695"/>
-                  </a:lnTo>
-                  <a:lnTo>
-                    <a:pt x="4578517" y="2888926"/>
-                  </a:lnTo>
-                  <a:lnTo>
-                    <a:pt x="4650139" y="2893128"/>
-                  </a:lnTo>
-                  <a:lnTo>
-                    <a:pt x="4721762" y="2897301"/>
-                  </a:lnTo>
-                  <a:lnTo>
-                    <a:pt x="4793384" y="2901444"/>
-                  </a:lnTo>
-                  <a:lnTo>
-                    <a:pt x="4865007" y="2905557"/>
-                  </a:lnTo>
-                  <a:lnTo>
-                    <a:pt x="4936629" y="2909642"/>
-                  </a:lnTo>
-                  <a:lnTo>
-                    <a:pt x="5008252" y="2913697"/>
-                  </a:lnTo>
-                  <a:lnTo>
-                    <a:pt x="5079875" y="2917724"/>
+                    <a:pt x="42001" y="171141"/>
+                  </a:lnTo>
+                  <a:lnTo>
+                    <a:pt x="113624" y="439348"/>
+                  </a:lnTo>
+                  <a:lnTo>
+                    <a:pt x="185246" y="685840"/>
+                  </a:lnTo>
+                  <a:lnTo>
+                    <a:pt x="256869" y="912375"/>
+                  </a:lnTo>
+                  <a:lnTo>
+                    <a:pt x="328491" y="1120568"/>
+                  </a:lnTo>
+                  <a:lnTo>
+                    <a:pt x="400114" y="1311904"/>
+                  </a:lnTo>
+                  <a:lnTo>
+                    <a:pt x="471736" y="1487749"/>
+                  </a:lnTo>
+                  <a:lnTo>
+                    <a:pt x="543359" y="1649356"/>
+                  </a:lnTo>
+                  <a:lnTo>
+                    <a:pt x="614981" y="1797879"/>
+                  </a:lnTo>
+                  <a:lnTo>
+                    <a:pt x="686604" y="1934377"/>
+                  </a:lnTo>
+                  <a:lnTo>
+                    <a:pt x="758226" y="2059822"/>
+                  </a:lnTo>
+                  <a:lnTo>
+                    <a:pt x="829849" y="2175112"/>
+                  </a:lnTo>
+                  <a:lnTo>
+                    <a:pt x="901471" y="2281066"/>
+                  </a:lnTo>
+                  <a:lnTo>
+                    <a:pt x="973094" y="2378442"/>
+                  </a:lnTo>
+                  <a:lnTo>
+                    <a:pt x="1044716" y="2467934"/>
+                  </a:lnTo>
+                  <a:lnTo>
+                    <a:pt x="1116339" y="2550180"/>
+                  </a:lnTo>
+                  <a:lnTo>
+                    <a:pt x="1187961" y="2625767"/>
+                  </a:lnTo>
+                  <a:lnTo>
+                    <a:pt x="1259584" y="2658339"/>
+                  </a:lnTo>
+                  <a:lnTo>
+                    <a:pt x="1331206" y="2665059"/>
+                  </a:lnTo>
+                  <a:lnTo>
+                    <a:pt x="1402829" y="2671725"/>
+                  </a:lnTo>
+                  <a:lnTo>
+                    <a:pt x="1474452" y="2678336"/>
+                  </a:lnTo>
+                  <a:lnTo>
+                    <a:pt x="1546074" y="2684893"/>
+                  </a:lnTo>
+                  <a:lnTo>
+                    <a:pt x="1617697" y="2691397"/>
+                  </a:lnTo>
+                  <a:lnTo>
+                    <a:pt x="1689319" y="2697848"/>
+                  </a:lnTo>
+                  <a:lnTo>
+                    <a:pt x="1760942" y="2704247"/>
+                  </a:lnTo>
+                  <a:lnTo>
+                    <a:pt x="1832564" y="2710593"/>
+                  </a:lnTo>
+                  <a:lnTo>
+                    <a:pt x="1904187" y="2716888"/>
+                  </a:lnTo>
+                  <a:lnTo>
+                    <a:pt x="1975809" y="2723131"/>
+                  </a:lnTo>
+                  <a:lnTo>
+                    <a:pt x="2047432" y="2729324"/>
+                  </a:lnTo>
+                  <a:lnTo>
+                    <a:pt x="2119054" y="2735466"/>
+                  </a:lnTo>
+                  <a:lnTo>
+                    <a:pt x="2190677" y="2741558"/>
+                  </a:lnTo>
+                  <a:lnTo>
+                    <a:pt x="2262299" y="2747601"/>
+                  </a:lnTo>
+                  <a:lnTo>
+                    <a:pt x="2333922" y="2753594"/>
+                  </a:lnTo>
+                  <a:lnTo>
+                    <a:pt x="2405544" y="2759539"/>
+                  </a:lnTo>
+                  <a:lnTo>
+                    <a:pt x="2477167" y="2765435"/>
+                  </a:lnTo>
+                  <a:lnTo>
+                    <a:pt x="2548789" y="2771283"/>
+                  </a:lnTo>
+                  <a:lnTo>
+                    <a:pt x="2620412" y="2777084"/>
+                  </a:lnTo>
+                  <a:lnTo>
+                    <a:pt x="2692034" y="2782837"/>
+                  </a:lnTo>
+                  <a:lnTo>
+                    <a:pt x="2763657" y="2788544"/>
+                  </a:lnTo>
+                  <a:lnTo>
+                    <a:pt x="2835280" y="2794204"/>
+                  </a:lnTo>
+                  <a:lnTo>
+                    <a:pt x="2906902" y="2799818"/>
+                  </a:lnTo>
+                  <a:lnTo>
+                    <a:pt x="2978525" y="2805386"/>
+                  </a:lnTo>
+                  <a:lnTo>
+                    <a:pt x="3050147" y="2810909"/>
+                  </a:lnTo>
+                  <a:lnTo>
+                    <a:pt x="3121770" y="2816387"/>
+                  </a:lnTo>
+                  <a:lnTo>
+                    <a:pt x="3193392" y="2821821"/>
+                  </a:lnTo>
+                  <a:lnTo>
+                    <a:pt x="3265015" y="2827210"/>
+                  </a:lnTo>
+                  <a:lnTo>
+                    <a:pt x="3336637" y="2832555"/>
+                  </a:lnTo>
+                  <a:lnTo>
+                    <a:pt x="3408260" y="2837857"/>
+                  </a:lnTo>
+                  <a:lnTo>
+                    <a:pt x="3479882" y="2843115"/>
+                  </a:lnTo>
+                  <a:lnTo>
+                    <a:pt x="3551505" y="2848331"/>
+                  </a:lnTo>
+                  <a:lnTo>
+                    <a:pt x="3623127" y="2853505"/>
+                  </a:lnTo>
+                  <a:lnTo>
+                    <a:pt x="3694750" y="2858636"/>
+                  </a:lnTo>
+                  <a:lnTo>
+                    <a:pt x="3766372" y="2863725"/>
+                  </a:lnTo>
+                  <a:lnTo>
+                    <a:pt x="3837995" y="2868773"/>
+                  </a:lnTo>
+                  <a:lnTo>
+                    <a:pt x="3909617" y="2873780"/>
+                  </a:lnTo>
+                  <a:lnTo>
+                    <a:pt x="3981240" y="2878746"/>
+                  </a:lnTo>
+                  <a:lnTo>
+                    <a:pt x="4052862" y="2883672"/>
+                  </a:lnTo>
+                  <a:lnTo>
+                    <a:pt x="4124485" y="2888557"/>
+                  </a:lnTo>
+                  <a:lnTo>
+                    <a:pt x="4196108" y="2893403"/>
+                  </a:lnTo>
+                  <a:lnTo>
+                    <a:pt x="4267730" y="2898210"/>
+                  </a:lnTo>
+                  <a:lnTo>
+                    <a:pt x="4339353" y="2902977"/>
+                  </a:lnTo>
+                  <a:lnTo>
+                    <a:pt x="4410975" y="2907705"/>
+                  </a:lnTo>
+                  <a:lnTo>
+                    <a:pt x="4482598" y="2912395"/>
+                  </a:lnTo>
+                  <a:lnTo>
+                    <a:pt x="4554220" y="2917047"/>
+                  </a:lnTo>
+                  <a:lnTo>
+                    <a:pt x="4625843" y="2921661"/>
+                  </a:lnTo>
+                  <a:lnTo>
+                    <a:pt x="4697465" y="2926237"/>
+                  </a:lnTo>
+                  <a:lnTo>
+                    <a:pt x="4769088" y="2930776"/>
+                  </a:lnTo>
+                  <a:lnTo>
+                    <a:pt x="4840710" y="2935278"/>
+                  </a:lnTo>
+                  <a:lnTo>
+                    <a:pt x="4912333" y="2939743"/>
+                  </a:lnTo>
+                  <a:lnTo>
+                    <a:pt x="4983955" y="2944173"/>
+                  </a:lnTo>
+                  <a:lnTo>
+                    <a:pt x="5055578" y="2948566"/>
                   </a:lnTo>
                 </a:path>
               </a:pathLst>
@@ -4266,309 +4266,309 @@
           </p:nvSpPr>
           <p:spPr>
             <a:xfrm>
-              <a:off x="1172049" y="4415313"/>
-              <a:ext cx="7090630" cy="1133117"/>
+              <a:off x="1172049" y="4355030"/>
+              <a:ext cx="7090630" cy="1193236"/>
             </a:xfrm>
             <a:custGeom>
               <a:avLst/>
               <a:pathLst>
-                <a:path w="7090630" h="1133117">
+                <a:path w="7090630" h="1193236">
                   <a:moveTo>
-                    <a:pt x="7090630" y="1133117"/>
+                    <a:pt x="7090630" y="1193236"/>
                   </a:moveTo>
                   <a:lnTo>
-                    <a:pt x="7019007" y="1132341"/>
-                  </a:lnTo>
-                  <a:lnTo>
-                    <a:pt x="6947385" y="1131498"/>
-                  </a:lnTo>
-                  <a:lnTo>
-                    <a:pt x="6875762" y="1130580"/>
-                  </a:lnTo>
-                  <a:lnTo>
-                    <a:pt x="6804139" y="1129581"/>
-                  </a:lnTo>
-                  <a:lnTo>
-                    <a:pt x="6732517" y="1128494"/>
-                  </a:lnTo>
-                  <a:lnTo>
-                    <a:pt x="6660894" y="1127312"/>
-                  </a:lnTo>
-                  <a:lnTo>
-                    <a:pt x="6589272" y="1126026"/>
-                  </a:lnTo>
-                  <a:lnTo>
-                    <a:pt x="6517649" y="1124626"/>
-                  </a:lnTo>
-                  <a:lnTo>
-                    <a:pt x="6446027" y="1123104"/>
-                  </a:lnTo>
-                  <a:lnTo>
-                    <a:pt x="6374404" y="1121448"/>
-                  </a:lnTo>
-                  <a:lnTo>
-                    <a:pt x="6302782" y="1119646"/>
-                  </a:lnTo>
-                  <a:lnTo>
-                    <a:pt x="6231159" y="1117685"/>
-                  </a:lnTo>
-                  <a:lnTo>
-                    <a:pt x="6159537" y="1115552"/>
-                  </a:lnTo>
-                  <a:lnTo>
-                    <a:pt x="6087914" y="1113232"/>
-                  </a:lnTo>
-                  <a:lnTo>
-                    <a:pt x="6016292" y="1110707"/>
-                  </a:lnTo>
-                  <a:lnTo>
-                    <a:pt x="5944669" y="1107961"/>
-                  </a:lnTo>
-                  <a:lnTo>
-                    <a:pt x="5873047" y="1104973"/>
-                  </a:lnTo>
-                  <a:lnTo>
-                    <a:pt x="5801424" y="1101722"/>
-                  </a:lnTo>
-                  <a:lnTo>
-                    <a:pt x="5729802" y="1098185"/>
-                  </a:lnTo>
-                  <a:lnTo>
-                    <a:pt x="5658179" y="1094337"/>
-                  </a:lnTo>
-                  <a:lnTo>
-                    <a:pt x="5586557" y="1090151"/>
-                  </a:lnTo>
-                  <a:lnTo>
-                    <a:pt x="5514934" y="1085596"/>
-                  </a:lnTo>
-                  <a:lnTo>
-                    <a:pt x="5443311" y="1080641"/>
-                  </a:lnTo>
-                  <a:lnTo>
-                    <a:pt x="5371689" y="1075250"/>
-                  </a:lnTo>
-                  <a:lnTo>
-                    <a:pt x="5300066" y="1069385"/>
-                  </a:lnTo>
-                  <a:lnTo>
-                    <a:pt x="5228444" y="1063004"/>
-                  </a:lnTo>
-                  <a:lnTo>
-                    <a:pt x="5156821" y="1056062"/>
-                  </a:lnTo>
-                  <a:lnTo>
-                    <a:pt x="5085199" y="1048509"/>
-                  </a:lnTo>
-                  <a:lnTo>
-                    <a:pt x="5013576" y="1040292"/>
-                  </a:lnTo>
-                  <a:lnTo>
-                    <a:pt x="4941954" y="1031353"/>
-                  </a:lnTo>
-                  <a:lnTo>
-                    <a:pt x="4870331" y="1021627"/>
-                  </a:lnTo>
-                  <a:lnTo>
-                    <a:pt x="4798709" y="1011046"/>
-                  </a:lnTo>
-                  <a:lnTo>
-                    <a:pt x="4727086" y="999534"/>
-                  </a:lnTo>
-                  <a:lnTo>
-                    <a:pt x="4655464" y="987009"/>
-                  </a:lnTo>
-                  <a:lnTo>
-                    <a:pt x="4583841" y="973384"/>
-                  </a:lnTo>
-                  <a:lnTo>
-                    <a:pt x="4512219" y="958559"/>
-                  </a:lnTo>
-                  <a:lnTo>
-                    <a:pt x="4440596" y="942431"/>
-                  </a:lnTo>
-                  <a:lnTo>
-                    <a:pt x="4368974" y="924885"/>
-                  </a:lnTo>
-                  <a:lnTo>
-                    <a:pt x="4297351" y="905795"/>
-                  </a:lnTo>
-                  <a:lnTo>
-                    <a:pt x="4225729" y="885026"/>
-                  </a:lnTo>
-                  <a:lnTo>
-                    <a:pt x="4154106" y="862431"/>
-                  </a:lnTo>
-                  <a:lnTo>
-                    <a:pt x="4082483" y="837848"/>
-                  </a:lnTo>
-                  <a:lnTo>
-                    <a:pt x="4010861" y="811103"/>
-                  </a:lnTo>
-                  <a:lnTo>
-                    <a:pt x="3939238" y="782007"/>
-                  </a:lnTo>
-                  <a:lnTo>
-                    <a:pt x="3867616" y="750351"/>
-                  </a:lnTo>
-                  <a:lnTo>
-                    <a:pt x="3795993" y="715910"/>
-                  </a:lnTo>
-                  <a:lnTo>
-                    <a:pt x="3724371" y="678441"/>
-                  </a:lnTo>
-                  <a:lnTo>
-                    <a:pt x="3652748" y="637677"/>
-                  </a:lnTo>
-                  <a:lnTo>
-                    <a:pt x="3581126" y="593327"/>
-                  </a:lnTo>
-                  <a:lnTo>
-                    <a:pt x="3509503" y="545076"/>
-                  </a:lnTo>
-                  <a:lnTo>
-                    <a:pt x="3437881" y="492582"/>
-                  </a:lnTo>
-                  <a:lnTo>
-                    <a:pt x="3366258" y="435471"/>
-                  </a:lnTo>
-                  <a:lnTo>
-                    <a:pt x="3294636" y="373337"/>
-                  </a:lnTo>
-                  <a:lnTo>
-                    <a:pt x="3223013" y="311908"/>
-                  </a:lnTo>
-                  <a:lnTo>
-                    <a:pt x="3151391" y="306003"/>
-                  </a:lnTo>
-                  <a:lnTo>
-                    <a:pt x="3079768" y="300056"/>
-                  </a:lnTo>
-                  <a:lnTo>
-                    <a:pt x="3008146" y="294066"/>
-                  </a:lnTo>
-                  <a:lnTo>
-                    <a:pt x="2936523" y="288034"/>
-                  </a:lnTo>
-                  <a:lnTo>
-                    <a:pt x="2864901" y="281959"/>
-                  </a:lnTo>
-                  <a:lnTo>
-                    <a:pt x="2793278" y="275840"/>
-                  </a:lnTo>
-                  <a:lnTo>
-                    <a:pt x="2721655" y="269678"/>
-                  </a:lnTo>
-                  <a:lnTo>
-                    <a:pt x="2650033" y="263473"/>
-                  </a:lnTo>
-                  <a:lnTo>
-                    <a:pt x="2578410" y="257223"/>
-                  </a:lnTo>
-                  <a:lnTo>
-                    <a:pt x="2506788" y="250928"/>
-                  </a:lnTo>
-                  <a:lnTo>
-                    <a:pt x="2435165" y="244589"/>
-                  </a:lnTo>
-                  <a:lnTo>
-                    <a:pt x="2363543" y="238205"/>
-                  </a:lnTo>
-                  <a:lnTo>
-                    <a:pt x="2291920" y="231775"/>
-                  </a:lnTo>
-                  <a:lnTo>
-                    <a:pt x="2220298" y="225300"/>
-                  </a:lnTo>
-                  <a:lnTo>
-                    <a:pt x="2148675" y="218779"/>
-                  </a:lnTo>
-                  <a:lnTo>
-                    <a:pt x="2077053" y="212211"/>
-                  </a:lnTo>
-                  <a:lnTo>
-                    <a:pt x="2005430" y="205596"/>
-                  </a:lnTo>
-                  <a:lnTo>
-                    <a:pt x="1933808" y="198935"/>
-                  </a:lnTo>
-                  <a:lnTo>
-                    <a:pt x="1862185" y="192226"/>
-                  </a:lnTo>
-                  <a:lnTo>
-                    <a:pt x="1790563" y="185469"/>
-                  </a:lnTo>
-                  <a:lnTo>
-                    <a:pt x="1718940" y="178664"/>
-                  </a:lnTo>
-                  <a:lnTo>
-                    <a:pt x="1647318" y="171811"/>
-                  </a:lnTo>
-                  <a:lnTo>
-                    <a:pt x="1575695" y="164909"/>
-                  </a:lnTo>
-                  <a:lnTo>
-                    <a:pt x="1504073" y="157958"/>
-                  </a:lnTo>
-                  <a:lnTo>
-                    <a:pt x="1432450" y="150957"/>
-                  </a:lnTo>
-                  <a:lnTo>
-                    <a:pt x="1360827" y="143907"/>
-                  </a:lnTo>
-                  <a:lnTo>
-                    <a:pt x="1289205" y="136806"/>
-                  </a:lnTo>
-                  <a:lnTo>
-                    <a:pt x="1217582" y="129655"/>
-                  </a:lnTo>
-                  <a:lnTo>
-                    <a:pt x="1145960" y="122453"/>
-                  </a:lnTo>
-                  <a:lnTo>
-                    <a:pt x="1074337" y="115200"/>
-                  </a:lnTo>
-                  <a:lnTo>
-                    <a:pt x="1002715" y="107895"/>
-                  </a:lnTo>
-                  <a:lnTo>
-                    <a:pt x="931092" y="100538"/>
-                  </a:lnTo>
-                  <a:lnTo>
-                    <a:pt x="859470" y="93129"/>
-                  </a:lnTo>
-                  <a:lnTo>
-                    <a:pt x="787847" y="85667"/>
-                  </a:lnTo>
-                  <a:lnTo>
-                    <a:pt x="716225" y="78153"/>
-                  </a:lnTo>
-                  <a:lnTo>
-                    <a:pt x="644602" y="70584"/>
-                  </a:lnTo>
-                  <a:lnTo>
-                    <a:pt x="572980" y="62962"/>
-                  </a:lnTo>
-                  <a:lnTo>
-                    <a:pt x="501357" y="55286"/>
-                  </a:lnTo>
-                  <a:lnTo>
-                    <a:pt x="429735" y="47555"/>
-                  </a:lnTo>
-                  <a:lnTo>
-                    <a:pt x="358112" y="39769"/>
-                  </a:lnTo>
-                  <a:lnTo>
-                    <a:pt x="286490" y="31927"/>
-                  </a:lnTo>
-                  <a:lnTo>
-                    <a:pt x="214867" y="24030"/>
-                  </a:lnTo>
-                  <a:lnTo>
-                    <a:pt x="143245" y="16076"/>
-                  </a:lnTo>
-                  <a:lnTo>
-                    <a:pt x="71622" y="8066"/>
+                    <a:pt x="7019007" y="1192445"/>
+                  </a:lnTo>
+                  <a:lnTo>
+                    <a:pt x="6947385" y="1191584"/>
+                  </a:lnTo>
+                  <a:lnTo>
+                    <a:pt x="6875762" y="1190647"/>
+                  </a:lnTo>
+                  <a:lnTo>
+                    <a:pt x="6804139" y="1189628"/>
+                  </a:lnTo>
+                  <a:lnTo>
+                    <a:pt x="6732517" y="1188519"/>
+                  </a:lnTo>
+                  <a:lnTo>
+                    <a:pt x="6660894" y="1187312"/>
+                  </a:lnTo>
+                  <a:lnTo>
+                    <a:pt x="6589272" y="1185998"/>
+                  </a:lnTo>
+                  <a:lnTo>
+                    <a:pt x="6517649" y="1184569"/>
+                  </a:lnTo>
+                  <a:lnTo>
+                    <a:pt x="6446027" y="1183014"/>
+                  </a:lnTo>
+                  <a:lnTo>
+                    <a:pt x="6374404" y="1181322"/>
+                  </a:lnTo>
+                  <a:lnTo>
+                    <a:pt x="6302782" y="1179481"/>
+                  </a:lnTo>
+                  <a:lnTo>
+                    <a:pt x="6231159" y="1177478"/>
+                  </a:lnTo>
+                  <a:lnTo>
+                    <a:pt x="6159537" y="1175299"/>
+                  </a:lnTo>
+                  <a:lnTo>
+                    <a:pt x="6087914" y="1172927"/>
+                  </a:lnTo>
+                  <a:lnTo>
+                    <a:pt x="6016292" y="1170347"/>
+                  </a:lnTo>
+                  <a:lnTo>
+                    <a:pt x="5944669" y="1167539"/>
+                  </a:lnTo>
+                  <a:lnTo>
+                    <a:pt x="5873047" y="1164483"/>
+                  </a:lnTo>
+                  <a:lnTo>
+                    <a:pt x="5801424" y="1161159"/>
+                  </a:lnTo>
+                  <a:lnTo>
+                    <a:pt x="5729802" y="1157542"/>
+                  </a:lnTo>
+                  <a:lnTo>
+                    <a:pt x="5658179" y="1153606"/>
+                  </a:lnTo>
+                  <a:lnTo>
+                    <a:pt x="5586557" y="1149323"/>
+                  </a:lnTo>
+                  <a:lnTo>
+                    <a:pt x="5514934" y="1144663"/>
+                  </a:lnTo>
+                  <a:lnTo>
+                    <a:pt x="5443311" y="1139592"/>
+                  </a:lnTo>
+                  <a:lnTo>
+                    <a:pt x="5371689" y="1134075"/>
+                  </a:lnTo>
+                  <a:lnTo>
+                    <a:pt x="5300066" y="1128071"/>
+                  </a:lnTo>
+                  <a:lnTo>
+                    <a:pt x="5228444" y="1121539"/>
+                  </a:lnTo>
+                  <a:lnTo>
+                    <a:pt x="5156821" y="1114431"/>
+                  </a:lnTo>
+                  <a:lnTo>
+                    <a:pt x="5085199" y="1106697"/>
+                  </a:lnTo>
+                  <a:lnTo>
+                    <a:pt x="5013576" y="1098282"/>
+                  </a:lnTo>
+                  <a:lnTo>
+                    <a:pt x="4941954" y="1089125"/>
+                  </a:lnTo>
+                  <a:lnTo>
+                    <a:pt x="4870331" y="1079162"/>
+                  </a:lnTo>
+                  <a:lnTo>
+                    <a:pt x="4798709" y="1068321"/>
+                  </a:lnTo>
+                  <a:lnTo>
+                    <a:pt x="4727086" y="1056524"/>
+                  </a:lnTo>
+                  <a:lnTo>
+                    <a:pt x="4655464" y="1043689"/>
+                  </a:lnTo>
+                  <a:lnTo>
+                    <a:pt x="4583841" y="1029723"/>
+                  </a:lnTo>
+                  <a:lnTo>
+                    <a:pt x="4512219" y="1014526"/>
+                  </a:lnTo>
+                  <a:lnTo>
+                    <a:pt x="4440596" y="997990"/>
+                  </a:lnTo>
+                  <a:lnTo>
+                    <a:pt x="4368974" y="979998"/>
+                  </a:lnTo>
+                  <a:lnTo>
+                    <a:pt x="4297351" y="960421"/>
+                  </a:lnTo>
+                  <a:lnTo>
+                    <a:pt x="4225729" y="939119"/>
+                  </a:lnTo>
+                  <a:lnTo>
+                    <a:pt x="4154106" y="915940"/>
+                  </a:lnTo>
+                  <a:lnTo>
+                    <a:pt x="4082483" y="890719"/>
+                  </a:lnTo>
+                  <a:lnTo>
+                    <a:pt x="4010861" y="863277"/>
+                  </a:lnTo>
+                  <a:lnTo>
+                    <a:pt x="3939238" y="833416"/>
+                  </a:lnTo>
+                  <a:lnTo>
+                    <a:pt x="3867616" y="800925"/>
+                  </a:lnTo>
+                  <a:lnTo>
+                    <a:pt x="3795993" y="765572"/>
+                  </a:lnTo>
+                  <a:lnTo>
+                    <a:pt x="3724371" y="727104"/>
+                  </a:lnTo>
+                  <a:lnTo>
+                    <a:pt x="3652748" y="685247"/>
+                  </a:lnTo>
+                  <a:lnTo>
+                    <a:pt x="3581126" y="639702"/>
+                  </a:lnTo>
+                  <a:lnTo>
+                    <a:pt x="3509503" y="590145"/>
+                  </a:lnTo>
+                  <a:lnTo>
+                    <a:pt x="3437881" y="536222"/>
+                  </a:lnTo>
+                  <a:lnTo>
+                    <a:pt x="3366258" y="477549"/>
+                  </a:lnTo>
+                  <a:lnTo>
+                    <a:pt x="3294636" y="413706"/>
+                  </a:lnTo>
+                  <a:lnTo>
+                    <a:pt x="3223013" y="370036"/>
+                  </a:lnTo>
+                  <a:lnTo>
+                    <a:pt x="3151391" y="363205"/>
+                  </a:lnTo>
+                  <a:lnTo>
+                    <a:pt x="3079768" y="356318"/>
+                  </a:lnTo>
+                  <a:lnTo>
+                    <a:pt x="3008146" y="349375"/>
+                  </a:lnTo>
+                  <a:lnTo>
+                    <a:pt x="2936523" y="342374"/>
+                  </a:lnTo>
+                  <a:lnTo>
+                    <a:pt x="2864901" y="335316"/>
+                  </a:lnTo>
+                  <a:lnTo>
+                    <a:pt x="2793278" y="328200"/>
+                  </a:lnTo>
+                  <a:lnTo>
+                    <a:pt x="2721655" y="321026"/>
+                  </a:lnTo>
+                  <a:lnTo>
+                    <a:pt x="2650033" y="313793"/>
+                  </a:lnTo>
+                  <a:lnTo>
+                    <a:pt x="2578410" y="306500"/>
+                  </a:lnTo>
+                  <a:lnTo>
+                    <a:pt x="2506788" y="299148"/>
+                  </a:lnTo>
+                  <a:lnTo>
+                    <a:pt x="2435165" y="291735"/>
+                  </a:lnTo>
+                  <a:lnTo>
+                    <a:pt x="2363543" y="284261"/>
+                  </a:lnTo>
+                  <a:lnTo>
+                    <a:pt x="2291920" y="276726"/>
+                  </a:lnTo>
+                  <a:lnTo>
+                    <a:pt x="2220298" y="269129"/>
+                  </a:lnTo>
+                  <a:lnTo>
+                    <a:pt x="2148675" y="261470"/>
+                  </a:lnTo>
+                  <a:lnTo>
+                    <a:pt x="2077053" y="253748"/>
+                  </a:lnTo>
+                  <a:lnTo>
+                    <a:pt x="2005430" y="245962"/>
+                  </a:lnTo>
+                  <a:lnTo>
+                    <a:pt x="1933808" y="238113"/>
+                  </a:lnTo>
+                  <a:lnTo>
+                    <a:pt x="1862185" y="230199"/>
+                  </a:lnTo>
+                  <a:lnTo>
+                    <a:pt x="1790563" y="222220"/>
+                  </a:lnTo>
+                  <a:lnTo>
+                    <a:pt x="1718940" y="214176"/>
+                  </a:lnTo>
+                  <a:lnTo>
+                    <a:pt x="1647318" y="206066"/>
+                  </a:lnTo>
+                  <a:lnTo>
+                    <a:pt x="1575695" y="197889"/>
+                  </a:lnTo>
+                  <a:lnTo>
+                    <a:pt x="1504073" y="189645"/>
+                  </a:lnTo>
+                  <a:lnTo>
+                    <a:pt x="1432450" y="181333"/>
+                  </a:lnTo>
+                  <a:lnTo>
+                    <a:pt x="1360827" y="172953"/>
+                  </a:lnTo>
+                  <a:lnTo>
+                    <a:pt x="1289205" y="164505"/>
+                  </a:lnTo>
+                  <a:lnTo>
+                    <a:pt x="1217582" y="155987"/>
+                  </a:lnTo>
+                  <a:lnTo>
+                    <a:pt x="1145960" y="147399"/>
+                  </a:lnTo>
+                  <a:lnTo>
+                    <a:pt x="1074337" y="138740"/>
+                  </a:lnTo>
+                  <a:lnTo>
+                    <a:pt x="1002715" y="130011"/>
+                  </a:lnTo>
+                  <a:lnTo>
+                    <a:pt x="931092" y="121210"/>
+                  </a:lnTo>
+                  <a:lnTo>
+                    <a:pt x="859470" y="112336"/>
+                  </a:lnTo>
+                  <a:lnTo>
+                    <a:pt x="787847" y="103390"/>
+                  </a:lnTo>
+                  <a:lnTo>
+                    <a:pt x="716225" y="94370"/>
+                  </a:lnTo>
+                  <a:lnTo>
+                    <a:pt x="644602" y="85277"/>
+                  </a:lnTo>
+                  <a:lnTo>
+                    <a:pt x="572980" y="76108"/>
+                  </a:lnTo>
+                  <a:lnTo>
+                    <a:pt x="501357" y="66865"/>
+                  </a:lnTo>
+                  <a:lnTo>
+                    <a:pt x="429735" y="57545"/>
+                  </a:lnTo>
+                  <a:lnTo>
+                    <a:pt x="358112" y="48149"/>
+                  </a:lnTo>
+                  <a:lnTo>
+                    <a:pt x="286490" y="38676"/>
+                  </a:lnTo>
+                  <a:lnTo>
+                    <a:pt x="214867" y="29125"/>
+                  </a:lnTo>
+                  <a:lnTo>
+                    <a:pt x="143245" y="19496"/>
+                  </a:lnTo>
+                  <a:lnTo>
+                    <a:pt x="71622" y="9788"/>
                   </a:lnTo>
                   <a:lnTo>
                     <a:pt x="0" y="0"/>
@@ -4591,273 +4591,270 @@
           </p:nvSpPr>
           <p:spPr>
             <a:xfrm>
-              <a:off x="2152803" y="2073503"/>
-              <a:ext cx="6109875" cy="3413094"/>
+              <a:off x="2204335" y="2073503"/>
+              <a:ext cx="6058343" cy="3414413"/>
             </a:xfrm>
             <a:custGeom>
               <a:avLst/>
               <a:pathLst>
-                <a:path w="6109875" h="3413094">
+                <a:path w="6058343" h="3414413">
                   <a:moveTo>
                     <a:pt x="0" y="0"/>
                   </a:moveTo>
                   <a:lnTo>
-                    <a:pt x="21960" y="49234"/>
-                  </a:lnTo>
-                  <a:lnTo>
-                    <a:pt x="93583" y="202634"/>
-                  </a:lnTo>
-                  <a:lnTo>
-                    <a:pt x="165205" y="349183"/>
-                  </a:lnTo>
-                  <a:lnTo>
-                    <a:pt x="236828" y="489186"/>
-                  </a:lnTo>
-                  <a:lnTo>
-                    <a:pt x="308450" y="622936"/>
-                  </a:lnTo>
-                  <a:lnTo>
-                    <a:pt x="380073" y="750712"/>
-                  </a:lnTo>
-                  <a:lnTo>
-                    <a:pt x="451695" y="872781"/>
-                  </a:lnTo>
-                  <a:lnTo>
-                    <a:pt x="523318" y="989399"/>
-                  </a:lnTo>
-                  <a:lnTo>
-                    <a:pt x="594940" y="1100807"/>
-                  </a:lnTo>
-                  <a:lnTo>
-                    <a:pt x="666563" y="1207239"/>
-                  </a:lnTo>
-                  <a:lnTo>
-                    <a:pt x="738186" y="1308918"/>
-                  </a:lnTo>
-                  <a:lnTo>
-                    <a:pt x="809808" y="1406055"/>
-                  </a:lnTo>
-                  <a:lnTo>
-                    <a:pt x="881431" y="1498854"/>
-                  </a:lnTo>
-                  <a:lnTo>
-                    <a:pt x="953053" y="1587508"/>
-                  </a:lnTo>
-                  <a:lnTo>
-                    <a:pt x="1024676" y="1672202"/>
-                  </a:lnTo>
-                  <a:lnTo>
-                    <a:pt x="1096298" y="1753114"/>
-                  </a:lnTo>
-                  <a:lnTo>
-                    <a:pt x="1167921" y="1830411"/>
-                  </a:lnTo>
-                  <a:lnTo>
-                    <a:pt x="1239543" y="1904256"/>
-                  </a:lnTo>
-                  <a:lnTo>
-                    <a:pt x="1311166" y="1974803"/>
-                  </a:lnTo>
-                  <a:lnTo>
-                    <a:pt x="1382788" y="2042199"/>
-                  </a:lnTo>
-                  <a:lnTo>
-                    <a:pt x="1454411" y="2106585"/>
-                  </a:lnTo>
-                  <a:lnTo>
-                    <a:pt x="1526033" y="2168095"/>
-                  </a:lnTo>
-                  <a:lnTo>
-                    <a:pt x="1597656" y="2226858"/>
-                  </a:lnTo>
-                  <a:lnTo>
-                    <a:pt x="1669278" y="2282996"/>
-                  </a:lnTo>
-                  <a:lnTo>
-                    <a:pt x="1740901" y="2336627"/>
-                  </a:lnTo>
-                  <a:lnTo>
-                    <a:pt x="1812523" y="2387862"/>
-                  </a:lnTo>
-                  <a:lnTo>
-                    <a:pt x="1884146" y="2436809"/>
-                  </a:lnTo>
-                  <a:lnTo>
-                    <a:pt x="1955768" y="2483570"/>
-                  </a:lnTo>
-                  <a:lnTo>
-                    <a:pt x="2027391" y="2528242"/>
-                  </a:lnTo>
-                  <a:lnTo>
-                    <a:pt x="2099014" y="2570919"/>
-                  </a:lnTo>
-                  <a:lnTo>
-                    <a:pt x="2170636" y="2611690"/>
-                  </a:lnTo>
-                  <a:lnTo>
-                    <a:pt x="2242259" y="2650640"/>
-                  </a:lnTo>
-                  <a:lnTo>
-                    <a:pt x="2313881" y="2687850"/>
-                  </a:lnTo>
-                  <a:lnTo>
-                    <a:pt x="2385504" y="2723398"/>
-                  </a:lnTo>
-                  <a:lnTo>
-                    <a:pt x="2457126" y="2757358"/>
-                  </a:lnTo>
-                  <a:lnTo>
-                    <a:pt x="2528749" y="2789802"/>
-                  </a:lnTo>
-                  <a:lnTo>
-                    <a:pt x="2600371" y="2820797"/>
-                  </a:lnTo>
-                  <a:lnTo>
-                    <a:pt x="2671994" y="2850407"/>
-                  </a:lnTo>
-                  <a:lnTo>
-                    <a:pt x="2743616" y="2878694"/>
-                  </a:lnTo>
-                  <a:lnTo>
-                    <a:pt x="2815239" y="2905719"/>
-                  </a:lnTo>
-                  <a:lnTo>
-                    <a:pt x="2886861" y="2931536"/>
-                  </a:lnTo>
-                  <a:lnTo>
-                    <a:pt x="2958484" y="2956200"/>
-                  </a:lnTo>
-                  <a:lnTo>
-                    <a:pt x="3030106" y="2979763"/>
-                  </a:lnTo>
-                  <a:lnTo>
-                    <a:pt x="3101729" y="3002273"/>
-                  </a:lnTo>
-                  <a:lnTo>
-                    <a:pt x="3173351" y="3023777"/>
-                  </a:lnTo>
-                  <a:lnTo>
-                    <a:pt x="3244974" y="3044322"/>
-                  </a:lnTo>
-                  <a:lnTo>
-                    <a:pt x="3316596" y="3063948"/>
-                  </a:lnTo>
-                  <a:lnTo>
-                    <a:pt x="3388219" y="3082698"/>
-                  </a:lnTo>
-                  <a:lnTo>
-                    <a:pt x="3459842" y="3100611"/>
-                  </a:lnTo>
-                  <a:lnTo>
-                    <a:pt x="3531464" y="3117723"/>
-                  </a:lnTo>
-                  <a:lnTo>
-                    <a:pt x="3603087" y="3134071"/>
-                  </a:lnTo>
-                  <a:lnTo>
-                    <a:pt x="3674709" y="3149689"/>
-                  </a:lnTo>
-                  <a:lnTo>
-                    <a:pt x="3746332" y="3164610"/>
-                  </a:lnTo>
-                  <a:lnTo>
-                    <a:pt x="3817954" y="3178864"/>
-                  </a:lnTo>
-                  <a:lnTo>
-                    <a:pt x="3889577" y="3192481"/>
-                  </a:lnTo>
-                  <a:lnTo>
-                    <a:pt x="3961199" y="3205490"/>
-                  </a:lnTo>
-                  <a:lnTo>
-                    <a:pt x="4032822" y="3217919"/>
-                  </a:lnTo>
-                  <a:lnTo>
-                    <a:pt x="4104444" y="3229792"/>
-                  </a:lnTo>
-                  <a:lnTo>
-                    <a:pt x="4176067" y="3241134"/>
-                  </a:lnTo>
-                  <a:lnTo>
-                    <a:pt x="4247689" y="3251970"/>
-                  </a:lnTo>
-                  <a:lnTo>
-                    <a:pt x="4319312" y="3262323"/>
-                  </a:lnTo>
-                  <a:lnTo>
-                    <a:pt x="4390934" y="3272212"/>
-                  </a:lnTo>
-                  <a:lnTo>
-                    <a:pt x="4462557" y="3281660"/>
-                  </a:lnTo>
-                  <a:lnTo>
-                    <a:pt x="4534179" y="3290686"/>
-                  </a:lnTo>
-                  <a:lnTo>
-                    <a:pt x="4605802" y="3299309"/>
-                  </a:lnTo>
-                  <a:lnTo>
-                    <a:pt x="4677424" y="3307547"/>
-                  </a:lnTo>
-                  <a:lnTo>
-                    <a:pt x="4749047" y="3315417"/>
-                  </a:lnTo>
-                  <a:lnTo>
-                    <a:pt x="4820670" y="3322935"/>
-                  </a:lnTo>
-                  <a:lnTo>
-                    <a:pt x="4892292" y="3330118"/>
-                  </a:lnTo>
-                  <a:lnTo>
-                    <a:pt x="4963915" y="3336979"/>
-                  </a:lnTo>
-                  <a:lnTo>
-                    <a:pt x="5035537" y="3343535"/>
-                  </a:lnTo>
-                  <a:lnTo>
-                    <a:pt x="5107160" y="3349797"/>
-                  </a:lnTo>
-                  <a:lnTo>
-                    <a:pt x="5178782" y="3355780"/>
-                  </a:lnTo>
-                  <a:lnTo>
-                    <a:pt x="5250405" y="3361495"/>
-                  </a:lnTo>
-                  <a:lnTo>
-                    <a:pt x="5322027" y="3366956"/>
-                  </a:lnTo>
-                  <a:lnTo>
-                    <a:pt x="5393650" y="3372172"/>
-                  </a:lnTo>
-                  <a:lnTo>
-                    <a:pt x="5465272" y="3377156"/>
-                  </a:lnTo>
-                  <a:lnTo>
-                    <a:pt x="5536895" y="3381916"/>
-                  </a:lnTo>
-                  <a:lnTo>
-                    <a:pt x="5608517" y="3386464"/>
-                  </a:lnTo>
-                  <a:lnTo>
-                    <a:pt x="5680140" y="3390810"/>
-                  </a:lnTo>
-                  <a:lnTo>
-                    <a:pt x="5751762" y="3394960"/>
-                  </a:lnTo>
-                  <a:lnTo>
-                    <a:pt x="5823385" y="3398926"/>
-                  </a:lnTo>
-                  <a:lnTo>
-                    <a:pt x="5895007" y="3402714"/>
-                  </a:lnTo>
-                  <a:lnTo>
-                    <a:pt x="5966630" y="3406334"/>
-                  </a:lnTo>
-                  <a:lnTo>
-                    <a:pt x="6038252" y="3409791"/>
-                  </a:lnTo>
-                  <a:lnTo>
-                    <a:pt x="6109875" y="3413094"/>
+                    <a:pt x="42051" y="94312"/>
+                  </a:lnTo>
+                  <a:lnTo>
+                    <a:pt x="113674" y="247676"/>
+                  </a:lnTo>
+                  <a:lnTo>
+                    <a:pt x="185296" y="394101"/>
+                  </a:lnTo>
+                  <a:lnTo>
+                    <a:pt x="256919" y="533900"/>
+                  </a:lnTo>
+                  <a:lnTo>
+                    <a:pt x="328541" y="667374"/>
+                  </a:lnTo>
+                  <a:lnTo>
+                    <a:pt x="400164" y="794809"/>
+                  </a:lnTo>
+                  <a:lnTo>
+                    <a:pt x="471786" y="916477"/>
+                  </a:lnTo>
+                  <a:lnTo>
+                    <a:pt x="543409" y="1032640"/>
+                  </a:lnTo>
+                  <a:lnTo>
+                    <a:pt x="615031" y="1143548"/>
+                  </a:lnTo>
+                  <a:lnTo>
+                    <a:pt x="686654" y="1249436"/>
+                  </a:lnTo>
+                  <a:lnTo>
+                    <a:pt x="758276" y="1350534"/>
+                  </a:lnTo>
+                  <a:lnTo>
+                    <a:pt x="829899" y="1447057"/>
+                  </a:lnTo>
+                  <a:lnTo>
+                    <a:pt x="901521" y="1539213"/>
+                  </a:lnTo>
+                  <a:lnTo>
+                    <a:pt x="973144" y="1627198"/>
+                  </a:lnTo>
+                  <a:lnTo>
+                    <a:pt x="1044767" y="1711203"/>
+                  </a:lnTo>
+                  <a:lnTo>
+                    <a:pt x="1116389" y="1791407"/>
+                  </a:lnTo>
+                  <a:lnTo>
+                    <a:pt x="1188012" y="1867981"/>
+                  </a:lnTo>
+                  <a:lnTo>
+                    <a:pt x="1259634" y="1941091"/>
+                  </a:lnTo>
+                  <a:lnTo>
+                    <a:pt x="1331257" y="2010893"/>
+                  </a:lnTo>
+                  <a:lnTo>
+                    <a:pt x="1402879" y="2077536"/>
+                  </a:lnTo>
+                  <a:lnTo>
+                    <a:pt x="1474502" y="2141164"/>
+                  </a:lnTo>
+                  <a:lnTo>
+                    <a:pt x="1546124" y="2201913"/>
+                  </a:lnTo>
+                  <a:lnTo>
+                    <a:pt x="1617747" y="2259913"/>
+                  </a:lnTo>
+                  <a:lnTo>
+                    <a:pt x="1689369" y="2315289"/>
+                  </a:lnTo>
+                  <a:lnTo>
+                    <a:pt x="1760992" y="2368159"/>
+                  </a:lnTo>
+                  <a:lnTo>
+                    <a:pt x="1832614" y="2418637"/>
+                  </a:lnTo>
+                  <a:lnTo>
+                    <a:pt x="1904237" y="2466830"/>
+                  </a:lnTo>
+                  <a:lnTo>
+                    <a:pt x="1975859" y="2512844"/>
+                  </a:lnTo>
+                  <a:lnTo>
+                    <a:pt x="2047482" y="2556775"/>
+                  </a:lnTo>
+                  <a:lnTo>
+                    <a:pt x="2119104" y="2598718"/>
+                  </a:lnTo>
+                  <a:lnTo>
+                    <a:pt x="2190727" y="2638764"/>
+                  </a:lnTo>
+                  <a:lnTo>
+                    <a:pt x="2262349" y="2676997"/>
+                  </a:lnTo>
+                  <a:lnTo>
+                    <a:pt x="2333972" y="2713501"/>
+                  </a:lnTo>
+                  <a:lnTo>
+                    <a:pt x="2405595" y="2748353"/>
+                  </a:lnTo>
+                  <a:lnTo>
+                    <a:pt x="2477217" y="2781628"/>
+                  </a:lnTo>
+                  <a:lnTo>
+                    <a:pt x="2548840" y="2813397"/>
+                  </a:lnTo>
+                  <a:lnTo>
+                    <a:pt x="2620462" y="2843729"/>
+                  </a:lnTo>
+                  <a:lnTo>
+                    <a:pt x="2692085" y="2872688"/>
+                  </a:lnTo>
+                  <a:lnTo>
+                    <a:pt x="2763707" y="2900337"/>
+                  </a:lnTo>
+                  <a:lnTo>
+                    <a:pt x="2835330" y="2926735"/>
+                  </a:lnTo>
+                  <a:lnTo>
+                    <a:pt x="2906952" y="2951939"/>
+                  </a:lnTo>
+                  <a:lnTo>
+                    <a:pt x="2978575" y="2976002"/>
+                  </a:lnTo>
+                  <a:lnTo>
+                    <a:pt x="3050197" y="2998976"/>
+                  </a:lnTo>
+                  <a:lnTo>
+                    <a:pt x="3121820" y="3020911"/>
+                  </a:lnTo>
+                  <a:lnTo>
+                    <a:pt x="3193442" y="3041853"/>
+                  </a:lnTo>
+                  <a:lnTo>
+                    <a:pt x="3265065" y="3061848"/>
+                  </a:lnTo>
+                  <a:lnTo>
+                    <a:pt x="3336687" y="3080938"/>
+                  </a:lnTo>
+                  <a:lnTo>
+                    <a:pt x="3408310" y="3099164"/>
+                  </a:lnTo>
+                  <a:lnTo>
+                    <a:pt x="3479932" y="3116565"/>
+                  </a:lnTo>
+                  <a:lnTo>
+                    <a:pt x="3551555" y="3133180"/>
+                  </a:lnTo>
+                  <a:lnTo>
+                    <a:pt x="3623177" y="3149042"/>
+                  </a:lnTo>
+                  <a:lnTo>
+                    <a:pt x="3694800" y="3164187"/>
+                  </a:lnTo>
+                  <a:lnTo>
+                    <a:pt x="3766423" y="3178646"/>
+                  </a:lnTo>
+                  <a:lnTo>
+                    <a:pt x="3838045" y="3192451"/>
+                  </a:lnTo>
+                  <a:lnTo>
+                    <a:pt x="3909668" y="3205632"/>
+                  </a:lnTo>
+                  <a:lnTo>
+                    <a:pt x="3981290" y="3218216"/>
+                  </a:lnTo>
+                  <a:lnTo>
+                    <a:pt x="4052913" y="3230230"/>
+                  </a:lnTo>
+                  <a:lnTo>
+                    <a:pt x="4124535" y="3241701"/>
+                  </a:lnTo>
+                  <a:lnTo>
+                    <a:pt x="4196158" y="3252653"/>
+                  </a:lnTo>
+                  <a:lnTo>
+                    <a:pt x="4267780" y="3263110"/>
+                  </a:lnTo>
+                  <a:lnTo>
+                    <a:pt x="4339403" y="3273093"/>
+                  </a:lnTo>
+                  <a:lnTo>
+                    <a:pt x="4411025" y="3282625"/>
+                  </a:lnTo>
+                  <a:lnTo>
+                    <a:pt x="4482648" y="3291725"/>
+                  </a:lnTo>
+                  <a:lnTo>
+                    <a:pt x="4554270" y="3300414"/>
+                  </a:lnTo>
+                  <a:lnTo>
+                    <a:pt x="4625893" y="3308709"/>
+                  </a:lnTo>
+                  <a:lnTo>
+                    <a:pt x="4697515" y="3316629"/>
+                  </a:lnTo>
+                  <a:lnTo>
+                    <a:pt x="4769138" y="3324191"/>
+                  </a:lnTo>
+                  <a:lnTo>
+                    <a:pt x="4840760" y="3331410"/>
+                  </a:lnTo>
+                  <a:lnTo>
+                    <a:pt x="4912383" y="3338303"/>
+                  </a:lnTo>
+                  <a:lnTo>
+                    <a:pt x="4984005" y="3344884"/>
+                  </a:lnTo>
+                  <a:lnTo>
+                    <a:pt x="5055628" y="3351167"/>
+                  </a:lnTo>
+                  <a:lnTo>
+                    <a:pt x="5127250" y="3357166"/>
+                  </a:lnTo>
+                  <a:lnTo>
+                    <a:pt x="5198873" y="3362894"/>
+                  </a:lnTo>
+                  <a:lnTo>
+                    <a:pt x="5270496" y="3368362"/>
+                  </a:lnTo>
+                  <a:lnTo>
+                    <a:pt x="5342118" y="3373583"/>
+                  </a:lnTo>
+                  <a:lnTo>
+                    <a:pt x="5413741" y="3378568"/>
+                  </a:lnTo>
+                  <a:lnTo>
+                    <a:pt x="5485363" y="3383327"/>
+                  </a:lnTo>
+                  <a:lnTo>
+                    <a:pt x="5556986" y="3387870"/>
+                  </a:lnTo>
+                  <a:lnTo>
+                    <a:pt x="5628608" y="3392209"/>
+                  </a:lnTo>
+                  <a:lnTo>
+                    <a:pt x="5700231" y="3396350"/>
+                  </a:lnTo>
+                  <a:lnTo>
+                    <a:pt x="5771853" y="3400305"/>
+                  </a:lnTo>
+                  <a:lnTo>
+                    <a:pt x="5843476" y="3404080"/>
+                  </a:lnTo>
+                  <a:lnTo>
+                    <a:pt x="5915098" y="3407685"/>
+                  </a:lnTo>
+                  <a:lnTo>
+                    <a:pt x="5986721" y="3411127"/>
+                  </a:lnTo>
+                  <a:lnTo>
+                    <a:pt x="6058343" y="3414413"/>
                   </a:lnTo>
                 </a:path>
               </a:pathLst>
@@ -4929,7 +4926,7 @@
           </p:nvSpPr>
           <p:spPr>
             <a:xfrm>
-              <a:off x="4401933" y="2073503"/>
+              <a:off x="4423736" y="2073503"/>
               <a:ext cx="0" cy="3649639"/>
             </a:xfrm>
             <a:custGeom>
@@ -4972,7 +4969,7 @@
           </p:nvSpPr>
           <p:spPr>
             <a:xfrm>
-              <a:off x="3507589" y="2073503"/>
+              <a:off x="3470882" y="2073503"/>
               <a:ext cx="0" cy="3649639"/>
             </a:xfrm>
             <a:custGeom>
@@ -5015,7 +5012,7 @@
           </p:nvSpPr>
           <p:spPr>
             <a:xfrm>
-              <a:off x="5433405" y="2073503"/>
+              <a:off x="5437283" y="2073503"/>
               <a:ext cx="0" cy="3649639"/>
             </a:xfrm>
             <a:custGeom>
@@ -5288,7 +5285,7 @@
           </p:nvSpPr>
           <p:spPr>
             <a:xfrm>
-              <a:off x="842324" y="5785772"/>
+              <a:off x="843419" y="5785772"/>
               <a:ext cx="161574" cy="80101"/>
             </a:xfrm>
             <a:prstGeom prst="rect">
@@ -5334,7 +5331,7 @@
           </p:nvSpPr>
           <p:spPr>
             <a:xfrm>
-              <a:off x="1681960" y="5785772"/>
+              <a:off x="1681469" y="5785772"/>
               <a:ext cx="161574" cy="80101"/>
             </a:xfrm>
             <a:prstGeom prst="rect">
@@ -5380,7 +5377,7 @@
           </p:nvSpPr>
           <p:spPr>
             <a:xfrm>
-              <a:off x="2521596" y="5785772"/>
+              <a:off x="2519520" y="5785772"/>
               <a:ext cx="161574" cy="80101"/>
             </a:xfrm>
             <a:prstGeom prst="rect">
@@ -5426,7 +5423,7 @@
           </p:nvSpPr>
           <p:spPr>
             <a:xfrm>
-              <a:off x="3361232" y="5785772"/>
+              <a:off x="3357571" y="5785772"/>
               <a:ext cx="161574" cy="80101"/>
             </a:xfrm>
             <a:prstGeom prst="rect">
@@ -5472,7 +5469,7 @@
           </p:nvSpPr>
           <p:spPr>
             <a:xfrm>
-              <a:off x="4200868" y="5785772"/>
+              <a:off x="4195621" y="5785772"/>
               <a:ext cx="161574" cy="80101"/>
             </a:xfrm>
             <a:prstGeom prst="rect">
@@ -5518,7 +5515,7 @@
           </p:nvSpPr>
           <p:spPr>
             <a:xfrm>
-              <a:off x="5090202" y="5785772"/>
+              <a:off x="5083370" y="5785772"/>
               <a:ext cx="62179" cy="80101"/>
             </a:xfrm>
             <a:prstGeom prst="rect">
@@ -5564,7 +5561,7 @@
           </p:nvSpPr>
           <p:spPr>
             <a:xfrm>
-              <a:off x="5898749" y="5785772"/>
+              <a:off x="5890331" y="5785772"/>
               <a:ext cx="124358" cy="80101"/>
             </a:xfrm>
             <a:prstGeom prst="rect">
@@ -5610,7 +5607,7 @@
           </p:nvSpPr>
           <p:spPr>
             <a:xfrm>
-              <a:off x="6738385" y="5785772"/>
+              <a:off x="6728381" y="5785772"/>
               <a:ext cx="124358" cy="80101"/>
             </a:xfrm>
             <a:prstGeom prst="rect">
@@ -5656,7 +5653,7 @@
           </p:nvSpPr>
           <p:spPr>
             <a:xfrm>
-              <a:off x="7578021" y="5785772"/>
+              <a:off x="7566432" y="5785772"/>
               <a:ext cx="124358" cy="80101"/>
             </a:xfrm>
             <a:prstGeom prst="rect">
@@ -5702,7 +5699,7 @@
           </p:nvSpPr>
           <p:spPr>
             <a:xfrm>
-              <a:off x="8417657" y="5785772"/>
+              <a:off x="8404483" y="5785772"/>
               <a:ext cx="124358" cy="80101"/>
             </a:xfrm>
             <a:prstGeom prst="rect">
@@ -5841,7 +5838,7 @@
           <p:spPr>
             <a:xfrm>
               <a:off x="817517" y="1896563"/>
-              <a:ext cx="6921825" cy="82021"/>
+              <a:ext cx="6985375" cy="82021"/>
             </a:xfrm>
             <a:prstGeom prst="rect">
               <a:avLst/>
@@ -5873,7 +5870,7 @@
                   <a:latin typeface="Helvetica"/>
                   <a:cs typeface="Helvetica"/>
                 </a:rPr>
-                <a:t>subHR per 10 % decline: 1.71 (1.09-2.69), p_Bonf = 0.122 (n = 6)  |  per IQR decline (Δ = 22.9 %): 3.42 (1.21-9.65)  |  IQR: [-19.2, 3.7] %</a:t>
+                <a:t>subHR per 10 % decline: 1.72 (1.10-2.69), p_Bonf = 0.104 (n = 6)  |  per IQR decline (Δ = 23.5 %): 3.57 (1.25-10.16)  |  IQR: [-19.6, 3.9] %</a:t>
               </a:r>
             </a:p>
           </p:txBody>
